--- a/presentation/project-1-presentation-rizki.pptx
+++ b/presentation/project-1-presentation-rizki.pptx
@@ -5,7 +5,7 @@
     <p:sldMasterId id="2147483648" r:id="rId1"/>
   </p:sldMasterIdLst>
   <p:notesMasterIdLst>
-    <p:notesMasterId r:id="rId9"/>
+    <p:notesMasterId r:id="rId11"/>
   </p:notesMasterIdLst>
   <p:sldIdLst>
     <p:sldId id="256" r:id="rId2"/>
@@ -15,27 +15,29 @@
     <p:sldId id="260" r:id="rId6"/>
     <p:sldId id="261" r:id="rId7"/>
     <p:sldId id="262" r:id="rId8"/>
+    <p:sldId id="263" r:id="rId9"/>
+    <p:sldId id="264" r:id="rId10"/>
   </p:sldIdLst>
   <p:sldSz cx="12192000" cy="6858000"/>
   <p:notesSz cx="6858000" cy="12192000"/>
   <p:embeddedFontLst>
     <p:embeddedFont>
       <p:font typeface="Big Shoulders ExtraBold" pitchFamily="2" charset="77"/>
-      <p:regular r:id="rId10"/>
-      <p:bold r:id="rId11"/>
+      <p:regular r:id="rId12"/>
+      <p:bold r:id="rId13"/>
     </p:embeddedFont>
     <p:embeddedFont>
       <p:font typeface="Red Hat Mono Medium" panose="02010509040201060303" pitchFamily="49" charset="0"/>
-      <p:regular r:id="rId12"/>
+      <p:regular r:id="rId14"/>
     </p:embeddedFont>
     <p:embeddedFont>
       <p:font typeface="Schibsted Grotesk" pitchFamily="2" charset="77"/>
-      <p:regular r:id="rId13"/>
+      <p:regular r:id="rId15"/>
     </p:embeddedFont>
     <p:embeddedFont>
       <p:font typeface="Schibsted Grotesk Bold" pitchFamily="2" charset="77"/>
-      <p:regular r:id="rId14"/>
-      <p:bold r:id="rId15"/>
+      <p:regular r:id="rId16"/>
+      <p:bold r:id="rId17"/>
     </p:embeddedFont>
   </p:embeddedFontLst>
   <p:defaultTextStyle>
@@ -869,11 +871,6 @@
 <file path=ppt/slideLayouts/slideLayout1.xml><?xml version="1.0" encoding="utf-8"?>
 <p:sldLayout xmlns:a="http://schemas.openxmlformats.org/drawingml/2006/main" xmlns:r="http://schemas.openxmlformats.org/officeDocument/2006/relationships" xmlns:p="http://schemas.openxmlformats.org/presentationml/2006/main" preserve="1">
   <p:cSld name="DEFAULT">
-    <p:bg>
-      <p:bgRef idx="1001">
-        <a:schemeClr val="bg1"/>
-      </p:bgRef>
-    </p:bg>
     <p:spTree>
       <p:nvGrpSpPr>
         <p:cNvPr id="1" name=""/>
@@ -1005,9 +1002,12 @@
 <p:sldMaster xmlns:a="http://schemas.openxmlformats.org/drawingml/2006/main" xmlns:r="http://schemas.openxmlformats.org/officeDocument/2006/relationships" xmlns:p="http://schemas.openxmlformats.org/presentationml/2006/main">
   <p:cSld>
     <p:bg>
-      <p:bgRef idx="1001">
-        <a:schemeClr val="bg1"/>
-      </p:bgRef>
+      <p:bgPr>
+        <a:solidFill>
+          <a:schemeClr val="bg1"/>
+        </a:solidFill>
+        <a:effectLst/>
+      </p:bgPr>
     </p:bg>
     <p:spTree>
       <p:nvGrpSpPr>
@@ -1301,6 +1301,39 @@
           <a:chExt cx="0" cy="0"/>
         </a:xfrm>
       </p:grpSpPr>
+      <p:sp>
+        <p:nvSpPr>
+          <p:cNvPr id="8" name="Shape 0">
+            <a:extLst>
+              <a:ext uri="{FF2B5EF4-FFF2-40B4-BE49-F238E27FC236}">
+                <a16:creationId xmlns:a16="http://schemas.microsoft.com/office/drawing/2014/main" id="{A91207F0-5EAE-56FE-9382-8E01FAFE232A}"/>
+              </a:ext>
+            </a:extLst>
+          </p:cNvPr>
+          <p:cNvSpPr/>
+          <p:nvPr/>
+        </p:nvSpPr>
+        <p:spPr>
+          <a:xfrm>
+            <a:off x="0" y="0"/>
+            <a:ext cx="12192000" cy="6858000"/>
+          </a:xfrm>
+          <a:prstGeom prst="rect">
+            <a:avLst/>
+          </a:prstGeom>
+          <a:solidFill>
+            <a:srgbClr val="FAFAF8"/>
+          </a:solidFill>
+          <a:ln/>
+        </p:spPr>
+        <p:txBody>
+          <a:bodyPr/>
+          <a:lstStyle/>
+          <a:p>
+            <a:endParaRPr lang="en-US"/>
+          </a:p>
+        </p:txBody>
+      </p:sp>
       <p:pic>
         <p:nvPicPr>
           <p:cNvPr id="2" name="Image 0" descr="preencoded.png"/>
@@ -1327,41 +1360,14 @@
       </p:pic>
       <p:sp>
         <p:nvSpPr>
-          <p:cNvPr id="3" name="Shape 0"/>
-          <p:cNvSpPr/>
-          <p:nvPr/>
-        </p:nvSpPr>
-        <p:spPr>
-          <a:xfrm>
-            <a:off x="7112127" y="0"/>
-            <a:ext cx="5079873" cy="6858000"/>
-          </a:xfrm>
-          <a:prstGeom prst="rect">
-            <a:avLst/>
-          </a:prstGeom>
-          <a:solidFill>
-            <a:srgbClr val="FAFAF8"/>
-          </a:solidFill>
-          <a:ln/>
-        </p:spPr>
-        <p:txBody>
-          <a:bodyPr/>
-          <a:lstStyle/>
-          <a:p>
-            <a:endParaRPr lang="en-US"/>
-          </a:p>
-        </p:txBody>
-      </p:sp>
-      <p:sp>
-        <p:nvSpPr>
           <p:cNvPr id="4" name="Text 1"/>
           <p:cNvSpPr/>
           <p:nvPr/>
         </p:nvSpPr>
         <p:spPr>
           <a:xfrm>
-            <a:off x="7594410" y="533400"/>
-            <a:ext cx="4597285" cy="198041"/>
+            <a:off x="7608606" y="1248736"/>
+            <a:ext cx="3868692" cy="212202"/>
           </a:xfrm>
           <a:prstGeom prst="rect">
             <a:avLst/>
@@ -1373,7 +1379,7 @@
           <a:bodyPr wrap="none" lIns="0" tIns="0" rIns="0" bIns="0" rtlCol="0" anchor="t"/>
           <a:lstStyle/>
           <a:p>
-            <a:pPr marL="0" indent="0" algn="l">
+            <a:pPr marL="0" indent="0">
               <a:lnSpc>
                 <a:spcPct val="108000"/>
               </a:lnSpc>
@@ -1382,7 +1388,9 @@
             <a:r>
               <a:rPr lang="en-US" sz="1200" kern="0" spc="48" dirty="0">
                 <a:solidFill>
-                  <a:srgbClr val="202020"/>
+                  <a:schemeClr val="bg2">
+                    <a:lumMod val="50000"/>
+                  </a:schemeClr>
                 </a:solidFill>
                 <a:latin typeface="Red Hat Mono Medium" pitchFamily="34" charset="0"/>
                 <a:ea typeface="Red Hat Mono Medium" pitchFamily="34" charset="-122"/>
@@ -1390,7 +1398,13 @@
               </a:rPr>
               <a:t>WEEK 3 · PROJECT 1</a:t>
             </a:r>
-            <a:endParaRPr lang="en-US" sz="1200" dirty="0"/>
+            <a:endParaRPr lang="en-US" sz="1200" dirty="0">
+              <a:solidFill>
+                <a:schemeClr val="bg2">
+                  <a:lumMod val="50000"/>
+                </a:schemeClr>
+              </a:solidFill>
+            </a:endParaRPr>
           </a:p>
         </p:txBody>
       </p:sp>
@@ -1402,8 +1416,8 @@
         </p:nvSpPr>
         <p:spPr>
           <a:xfrm>
-            <a:off x="7594410" y="3519230"/>
-            <a:ext cx="4114697" cy="319980"/>
+            <a:off x="7608911" y="3925202"/>
+            <a:ext cx="4552403" cy="319980"/>
           </a:xfrm>
           <a:prstGeom prst="rect">
             <a:avLst/>
@@ -1415,14 +1429,14 @@
           <a:bodyPr wrap="none" lIns="0" tIns="0" rIns="0" bIns="0" rtlCol="0" anchor="t"/>
           <a:lstStyle/>
           <a:p>
-            <a:pPr marL="0" indent="0" algn="l">
+            <a:pPr marL="0" indent="0">
               <a:lnSpc>
                 <a:spcPct val="75000"/>
               </a:lnSpc>
               <a:buNone/>
             </a:pPr>
             <a:r>
-              <a:rPr lang="en-US" sz="2800" kern="0" spc="28" dirty="0">
+              <a:rPr lang="en-US" sz="3200" kern="0" spc="28" dirty="0">
                 <a:solidFill>
                   <a:srgbClr val="202020"/>
                 </a:solidFill>
@@ -1430,9 +1444,9 @@
                 <a:ea typeface="Big Shoulders ExtraBold" pitchFamily="34" charset="-122"/>
                 <a:cs typeface="Big Shoulders ExtraBold" pitchFamily="34" charset="-120"/>
               </a:rPr>
-              <a:t>COFFEE LAND VS PRICE</a:t>
-            </a:r>
-            <a:endParaRPr lang="en-US" sz="2800" dirty="0"/>
+              <a:t>COFFEE LAND vs PRICE</a:t>
+            </a:r>
+            <a:endParaRPr lang="en-US" sz="3200" dirty="0"/>
           </a:p>
         </p:txBody>
       </p:sp>
@@ -1444,8 +1458,8 @@
         </p:nvSpPr>
         <p:spPr>
           <a:xfrm>
-            <a:off x="7594410" y="4042410"/>
-            <a:ext cx="4114697" cy="412750"/>
+            <a:off x="7608606" y="4314632"/>
+            <a:ext cx="4552403" cy="412750"/>
           </a:xfrm>
           <a:prstGeom prst="rect">
             <a:avLst/>
@@ -1459,24 +1473,51 @@
           </a:bodyPr>
           <a:lstStyle/>
           <a:p>
-            <a:pPr marL="0" indent="0" algn="l">
+            <a:pPr>
               <a:lnSpc>
                 <a:spcPct val="108000"/>
               </a:lnSpc>
-              <a:buNone/>
             </a:pPr>
             <a:r>
               <a:rPr lang="en-US" sz="1250" kern="0" spc="50" dirty="0">
                 <a:solidFill>
-                  <a:srgbClr val="202020"/>
+                  <a:schemeClr val="bg2">
+                    <a:lumMod val="25000"/>
+                  </a:schemeClr>
                 </a:solidFill>
                 <a:latin typeface="Red Hat Mono Medium" pitchFamily="34" charset="0"/>
                 <a:ea typeface="Red Hat Mono Medium" pitchFamily="34" charset="-122"/>
                 <a:cs typeface="Red Hat Mono Medium" pitchFamily="34" charset="-120"/>
               </a:rPr>
-              <a:t>EDA &amp; SQL · RIZKI FIRDAUS</a:t>
-            </a:r>
-            <a:endParaRPr lang="en-US" sz="1250" dirty="0"/>
+              <a:t>EDA &amp; SQL PROJECT PRESENTATION</a:t>
+            </a:r>
+          </a:p>
+          <a:p>
+            <a:pPr>
+              <a:lnSpc>
+                <a:spcPct val="108000"/>
+              </a:lnSpc>
+            </a:pPr>
+            <a:r>
+              <a:rPr lang="en-US" sz="1250" kern="0" spc="50" dirty="0">
+                <a:solidFill>
+                  <a:schemeClr val="bg2">
+                    <a:lumMod val="25000"/>
+                  </a:schemeClr>
+                </a:solidFill>
+                <a:latin typeface="Red Hat Mono Medium" pitchFamily="34" charset="0"/>
+                <a:ea typeface="Red Hat Mono Medium" pitchFamily="34" charset="-122"/>
+                <a:cs typeface="Red Hat Mono Medium" pitchFamily="34" charset="-120"/>
+              </a:rPr>
+              <a:t>BY RIZKI FIRDAUS</a:t>
+            </a:r>
+            <a:endParaRPr lang="en-US" sz="1250" dirty="0">
+              <a:solidFill>
+                <a:schemeClr val="bg2">
+                  <a:lumMod val="25000"/>
+                </a:schemeClr>
+              </a:solidFill>
+            </a:endParaRPr>
           </a:p>
         </p:txBody>
       </p:sp>
@@ -1494,8 +1535,8 @@
         </p:nvSpPr>
         <p:spPr>
           <a:xfrm>
-            <a:off x="7594410" y="6118225"/>
-            <a:ext cx="4114697" cy="412750"/>
+            <a:off x="7608299" y="6118225"/>
+            <a:ext cx="4583089" cy="412750"/>
           </a:xfrm>
           <a:prstGeom prst="rect">
             <a:avLst/>
@@ -1517,7 +1558,9 @@
             <a:r>
               <a:rPr lang="en-US" sz="1250" kern="0" spc="50" dirty="0">
                 <a:solidFill>
-                  <a:srgbClr val="202020"/>
+                  <a:schemeClr val="bg2">
+                    <a:lumMod val="50000"/>
+                  </a:schemeClr>
                 </a:solidFill>
                 <a:latin typeface="Red Hat Mono Medium" pitchFamily="34" charset="0"/>
                 <a:ea typeface="Red Hat Mono Medium" pitchFamily="34" charset="-122"/>
@@ -1525,7 +1568,13 @@
               </a:rPr>
               <a:t>2 OCTOBER 2026</a:t>
             </a:r>
-            <a:endParaRPr lang="en-US" sz="1250" dirty="0"/>
+            <a:endParaRPr lang="en-US" sz="1250" dirty="0">
+              <a:solidFill>
+                <a:schemeClr val="bg2">
+                  <a:lumMod val="50000"/>
+                </a:schemeClr>
+              </a:solidFill>
+            </a:endParaRPr>
           </a:p>
         </p:txBody>
       </p:sp>
@@ -1556,14 +1605,20 @@
       </p:grpSpPr>
       <p:sp>
         <p:nvSpPr>
-          <p:cNvPr id="7" name="Shape 5"/>
+          <p:cNvPr id="10" name="Shape 0">
+            <a:extLst>
+              <a:ext uri="{FF2B5EF4-FFF2-40B4-BE49-F238E27FC236}">
+                <a16:creationId xmlns:a16="http://schemas.microsoft.com/office/drawing/2014/main" id="{42166F31-517E-8A5A-4418-346CAC521771}"/>
+              </a:ext>
+            </a:extLst>
+          </p:cNvPr>
           <p:cNvSpPr/>
           <p:nvPr/>
         </p:nvSpPr>
         <p:spPr>
           <a:xfrm>
-            <a:off x="5892958" y="0"/>
-            <a:ext cx="6299042" cy="6858000"/>
+            <a:off x="0" y="0"/>
+            <a:ext cx="12192000" cy="6858000"/>
           </a:xfrm>
           <a:prstGeom prst="rect">
             <a:avLst/>
@@ -1583,41 +1638,14 @@
       </p:sp>
       <p:sp>
         <p:nvSpPr>
-          <p:cNvPr id="2" name="Shape 0"/>
-          <p:cNvSpPr/>
-          <p:nvPr/>
-        </p:nvSpPr>
-        <p:spPr>
-          <a:xfrm>
-            <a:off x="0" y="0"/>
-            <a:ext cx="5892653" cy="6858000"/>
-          </a:xfrm>
-          <a:prstGeom prst="rect">
-            <a:avLst/>
-          </a:prstGeom>
-          <a:solidFill>
-            <a:srgbClr val="FAFAF8"/>
-          </a:solidFill>
-          <a:ln/>
-        </p:spPr>
-        <p:txBody>
-          <a:bodyPr/>
-          <a:lstStyle/>
-          <a:p>
-            <a:endParaRPr lang="en-US"/>
-          </a:p>
-        </p:txBody>
-      </p:sp>
-      <p:sp>
-        <p:nvSpPr>
           <p:cNvPr id="3" name="Text 1"/>
           <p:cNvSpPr/>
           <p:nvPr/>
         </p:nvSpPr>
         <p:spPr>
           <a:xfrm>
-            <a:off x="965176" y="1497131"/>
-            <a:ext cx="5587860" cy="198041"/>
+            <a:off x="1195836" y="1636145"/>
+            <a:ext cx="4941354" cy="198041"/>
           </a:xfrm>
           <a:prstGeom prst="rect">
             <a:avLst/>
@@ -1658,8 +1686,8 @@
         </p:nvSpPr>
         <p:spPr>
           <a:xfrm>
-            <a:off x="965176" y="1828521"/>
-            <a:ext cx="5283068" cy="410170"/>
+            <a:off x="1195836" y="1967535"/>
+            <a:ext cx="4900164" cy="410170"/>
           </a:xfrm>
           <a:prstGeom prst="rect">
             <a:avLst/>
@@ -1686,7 +1714,7 @@
                 <a:ea typeface="Big Shoulders ExtraBold" pitchFamily="34" charset="-122"/>
                 <a:cs typeface="Big Shoulders ExtraBold" pitchFamily="34" charset="-120"/>
               </a:rPr>
-              <a:t>FROM FARM TO FINAL CUP</a:t>
+              <a:t>FROM FARM TO CUP</a:t>
             </a:r>
             <a:endParaRPr lang="en-US" sz="3400" dirty="0"/>
           </a:p>
@@ -1700,8 +1728,8 @@
         </p:nvSpPr>
         <p:spPr>
           <a:xfrm>
-            <a:off x="6248244" y="2907843"/>
-            <a:ext cx="5587860" cy="284460"/>
+            <a:off x="6540396" y="2628696"/>
+            <a:ext cx="5232270" cy="284460"/>
           </a:xfrm>
           <a:prstGeom prst="rect">
             <a:avLst/>
@@ -1742,7 +1770,7 @@
         </p:nvSpPr>
         <p:spPr>
           <a:xfrm>
-            <a:off x="6248244" y="3376452"/>
+            <a:off x="6540396" y="3097305"/>
             <a:ext cx="5232270" cy="1510517"/>
           </a:xfrm>
           <a:prstGeom prst="rect">
@@ -1818,21 +1846,281 @@
           <p:nvPr/>
         </p:nvPicPr>
         <p:blipFill>
-          <a:blip r:embed="rId3"/>
+          <a:blip r:embed="rId3">
+            <a:clrChange>
+              <a:clrFrom>
+                <a:srgbClr val="FFFFFF"/>
+              </a:clrFrom>
+              <a:clrTo>
+                <a:srgbClr val="FFFFFF">
+                  <a:alpha val="0"/>
+                </a:srgbClr>
+              </a:clrTo>
+            </a:clrChange>
+          </a:blip>
           <a:stretch>
             <a:fillRect/>
           </a:stretch>
         </p:blipFill>
         <p:spPr>
           <a:xfrm>
-            <a:off x="965176" y="2463898"/>
-            <a:ext cx="4648084" cy="2820690"/>
+            <a:off x="760654" y="2521180"/>
+            <a:ext cx="5376536" cy="3262751"/>
           </a:xfrm>
           <a:prstGeom prst="rect">
             <a:avLst/>
           </a:prstGeom>
         </p:spPr>
       </p:pic>
+      <p:cxnSp>
+        <p:nvCxnSpPr>
+          <p:cNvPr id="11" name="Straight Connector 10">
+            <a:extLst>
+              <a:ext uri="{FF2B5EF4-FFF2-40B4-BE49-F238E27FC236}">
+                <a16:creationId xmlns:a16="http://schemas.microsoft.com/office/drawing/2014/main" id="{F01922FD-F930-9744-3A0F-1B166E06CB67}"/>
+              </a:ext>
+            </a:extLst>
+          </p:cNvPr>
+          <p:cNvCxnSpPr>
+            <a:cxnSpLocks/>
+          </p:cNvCxnSpPr>
+          <p:nvPr/>
+        </p:nvCxnSpPr>
+        <p:spPr>
+          <a:xfrm>
+            <a:off x="6304934" y="2628696"/>
+            <a:ext cx="0" cy="3302119"/>
+          </a:xfrm>
+          <a:prstGeom prst="line">
+            <a:avLst/>
+          </a:prstGeom>
+          <a:ln>
+            <a:solidFill>
+              <a:schemeClr val="bg1">
+                <a:lumMod val="75000"/>
+              </a:schemeClr>
+            </a:solidFill>
+          </a:ln>
+        </p:spPr>
+        <p:style>
+          <a:lnRef idx="1">
+            <a:schemeClr val="dk1"/>
+          </a:lnRef>
+          <a:fillRef idx="0">
+            <a:schemeClr val="dk1"/>
+          </a:fillRef>
+          <a:effectRef idx="0">
+            <a:schemeClr val="dk1"/>
+          </a:effectRef>
+          <a:fontRef idx="minor">
+            <a:schemeClr val="tx1"/>
+          </a:fontRef>
+        </p:style>
+      </p:cxnSp>
+      <p:sp>
+        <p:nvSpPr>
+          <p:cNvPr id="13" name="TextBox 12">
+            <a:extLst>
+              <a:ext uri="{FF2B5EF4-FFF2-40B4-BE49-F238E27FC236}">
+                <a16:creationId xmlns:a16="http://schemas.microsoft.com/office/drawing/2014/main" id="{A347E115-E892-73C4-C9E0-5825B4BF8C12}"/>
+              </a:ext>
+            </a:extLst>
+          </p:cNvPr>
+          <p:cNvSpPr txBox="1"/>
+          <p:nvPr/>
+        </p:nvSpPr>
+        <p:spPr>
+          <a:xfrm>
+            <a:off x="0" y="6617362"/>
+            <a:ext cx="12192000" cy="236155"/>
+          </a:xfrm>
+          <a:prstGeom prst="rect">
+            <a:avLst/>
+          </a:prstGeom>
+          <a:noFill/>
+        </p:spPr>
+        <p:txBody>
+          <a:bodyPr wrap="square">
+            <a:spAutoFit/>
+          </a:bodyPr>
+          <a:lstStyle/>
+          <a:p>
+            <a:pPr algn="ctr">
+              <a:lnSpc>
+                <a:spcPct val="108000"/>
+              </a:lnSpc>
+            </a:pPr>
+            <a:r>
+              <a:rPr lang="en-US" sz="900" kern="0" spc="50" dirty="0">
+                <a:solidFill>
+                  <a:schemeClr val="bg2">
+                    <a:lumMod val="90000"/>
+                  </a:schemeClr>
+                </a:solidFill>
+                <a:latin typeface="Red Hat Mono Medium" pitchFamily="34" charset="0"/>
+                <a:ea typeface="Red Hat Mono Medium" pitchFamily="34" charset="-122"/>
+                <a:cs typeface="Red Hat Mono Medium" pitchFamily="34" charset="-120"/>
+              </a:rPr>
+              <a:t>EDA &amp; SQL PROJECT PRESENTATION by RIZKI FIRDAUS</a:t>
+            </a:r>
+            <a:endParaRPr lang="en-US" sz="900" dirty="0">
+              <a:solidFill>
+                <a:schemeClr val="bg2">
+                  <a:lumMod val="90000"/>
+                </a:schemeClr>
+              </a:solidFill>
+            </a:endParaRPr>
+          </a:p>
+        </p:txBody>
+      </p:sp>
+      <p:sp>
+        <p:nvSpPr>
+          <p:cNvPr id="14" name="TextBox 13">
+            <a:extLst>
+              <a:ext uri="{FF2B5EF4-FFF2-40B4-BE49-F238E27FC236}">
+                <a16:creationId xmlns:a16="http://schemas.microsoft.com/office/drawing/2014/main" id="{63DBE16E-FAF5-3080-B9D3-D3C0F65D009D}"/>
+              </a:ext>
+            </a:extLst>
+          </p:cNvPr>
+          <p:cNvSpPr txBox="1"/>
+          <p:nvPr/>
+        </p:nvSpPr>
+        <p:spPr>
+          <a:xfrm rot="16200000">
+            <a:off x="-3291204" y="3313584"/>
+            <a:ext cx="6858002" cy="230832"/>
+          </a:xfrm>
+          <a:prstGeom prst="rect">
+            <a:avLst/>
+          </a:prstGeom>
+          <a:noFill/>
+        </p:spPr>
+        <p:txBody>
+          <a:bodyPr wrap="square" rtlCol="0">
+            <a:spAutoFit/>
+          </a:bodyPr>
+          <a:lstStyle/>
+          <a:p>
+            <a:pPr algn="ctr"/>
+            <a:r>
+              <a:rPr lang="en-US" sz="900" kern="0" spc="50" dirty="0">
+                <a:solidFill>
+                  <a:schemeClr val="bg2">
+                    <a:lumMod val="90000"/>
+                  </a:schemeClr>
+                </a:solidFill>
+                <a:latin typeface="Red Hat Mono Medium" pitchFamily="34" charset="0"/>
+                <a:ea typeface="Red Hat Mono Medium" pitchFamily="34" charset="-122"/>
+                <a:cs typeface="Red Hat Mono Medium" pitchFamily="34" charset="-120"/>
+              </a:rPr>
+              <a:t>IRONHACK | WEEK 3 | PROJECT 1</a:t>
+            </a:r>
+            <a:endParaRPr lang="en-US" sz="900" dirty="0"/>
+          </a:p>
+        </p:txBody>
+      </p:sp>
+      <p:sp>
+        <p:nvSpPr>
+          <p:cNvPr id="15" name="TextBox 14">
+            <a:extLst>
+              <a:ext uri="{FF2B5EF4-FFF2-40B4-BE49-F238E27FC236}">
+                <a16:creationId xmlns:a16="http://schemas.microsoft.com/office/drawing/2014/main" id="{026EDD97-416F-C441-255E-7EC5A90F99A0}"/>
+              </a:ext>
+            </a:extLst>
+          </p:cNvPr>
+          <p:cNvSpPr txBox="1"/>
+          <p:nvPr/>
+        </p:nvSpPr>
+        <p:spPr>
+          <a:xfrm>
+            <a:off x="0" y="20750"/>
+            <a:ext cx="12192000" cy="236155"/>
+          </a:xfrm>
+          <a:prstGeom prst="rect">
+            <a:avLst/>
+          </a:prstGeom>
+          <a:noFill/>
+        </p:spPr>
+        <p:txBody>
+          <a:bodyPr wrap="square">
+            <a:spAutoFit/>
+          </a:bodyPr>
+          <a:lstStyle/>
+          <a:p>
+            <a:pPr algn="ctr">
+              <a:lnSpc>
+                <a:spcPct val="108000"/>
+              </a:lnSpc>
+            </a:pPr>
+            <a:r>
+              <a:rPr lang="en-US" sz="900" kern="0" spc="50" dirty="0">
+                <a:solidFill>
+                  <a:schemeClr val="bg2">
+                    <a:lumMod val="90000"/>
+                  </a:schemeClr>
+                </a:solidFill>
+                <a:latin typeface="Red Hat Mono Medium" pitchFamily="34" charset="0"/>
+                <a:ea typeface="Red Hat Mono Medium" pitchFamily="34" charset="-122"/>
+                <a:cs typeface="Red Hat Mono Medium" pitchFamily="34" charset="-120"/>
+              </a:rPr>
+              <a:t>- COFFEE LAND VS PRICE -</a:t>
+            </a:r>
+            <a:endParaRPr lang="en-US" sz="900" dirty="0">
+              <a:solidFill>
+                <a:schemeClr val="bg2">
+                  <a:lumMod val="90000"/>
+                </a:schemeClr>
+              </a:solidFill>
+            </a:endParaRPr>
+          </a:p>
+        </p:txBody>
+      </p:sp>
+      <p:sp>
+        <p:nvSpPr>
+          <p:cNvPr id="17" name="TextBox 16">
+            <a:extLst>
+              <a:ext uri="{FF2B5EF4-FFF2-40B4-BE49-F238E27FC236}">
+                <a16:creationId xmlns:a16="http://schemas.microsoft.com/office/drawing/2014/main" id="{44E77790-D2E3-4879-5A2A-2611D2E54E91}"/>
+              </a:ext>
+            </a:extLst>
+          </p:cNvPr>
+          <p:cNvSpPr txBox="1"/>
+          <p:nvPr/>
+        </p:nvSpPr>
+        <p:spPr>
+          <a:xfrm rot="5400000">
+            <a:off x="8626826" y="3313584"/>
+            <a:ext cx="6858002" cy="230832"/>
+          </a:xfrm>
+          <a:prstGeom prst="rect">
+            <a:avLst/>
+          </a:prstGeom>
+          <a:noFill/>
+        </p:spPr>
+        <p:txBody>
+          <a:bodyPr wrap="square" rtlCol="0">
+            <a:spAutoFit/>
+          </a:bodyPr>
+          <a:lstStyle/>
+          <a:p>
+            <a:pPr algn="ctr"/>
+            <a:r>
+              <a:rPr lang="en-US" sz="900" kern="0" spc="50" dirty="0">
+                <a:solidFill>
+                  <a:schemeClr val="bg2">
+                    <a:lumMod val="90000"/>
+                  </a:schemeClr>
+                </a:solidFill>
+                <a:latin typeface="Red Hat Mono Medium" pitchFamily="34" charset="0"/>
+                <a:ea typeface="Red Hat Mono Medium" pitchFamily="34" charset="-122"/>
+                <a:cs typeface="Red Hat Mono Medium" pitchFamily="34" charset="-120"/>
+              </a:rPr>
+              <a:t>2 OCTOBER 2026</a:t>
+            </a:r>
+            <a:endParaRPr lang="en-US" sz="900" dirty="0"/>
+          </a:p>
+        </p:txBody>
+      </p:sp>
     </p:spTree>
   </p:cSld>
   <p:clrMapOvr>
@@ -1860,14 +2148,101 @@
       </p:grpSpPr>
       <p:sp>
         <p:nvSpPr>
+          <p:cNvPr id="28" name="Shape 0">
+            <a:extLst>
+              <a:ext uri="{FF2B5EF4-FFF2-40B4-BE49-F238E27FC236}">
+                <a16:creationId xmlns:a16="http://schemas.microsoft.com/office/drawing/2014/main" id="{F6717B5C-FFF1-9557-5951-D91025CFE785}"/>
+              </a:ext>
+            </a:extLst>
+          </p:cNvPr>
+          <p:cNvSpPr/>
+          <p:nvPr/>
+        </p:nvSpPr>
+        <p:spPr>
+          <a:xfrm>
+            <a:off x="0" y="0"/>
+            <a:ext cx="12192000" cy="6858000"/>
+          </a:xfrm>
+          <a:prstGeom prst="rect">
+            <a:avLst/>
+          </a:prstGeom>
+          <a:solidFill>
+            <a:srgbClr val="FAFAF8"/>
+          </a:solidFill>
+          <a:ln/>
+        </p:spPr>
+        <p:txBody>
+          <a:bodyPr/>
+          <a:lstStyle/>
+          <a:p>
+            <a:endParaRPr lang="en-US" dirty="0"/>
+          </a:p>
+        </p:txBody>
+      </p:sp>
+      <p:sp>
+        <p:nvSpPr>
+          <p:cNvPr id="29" name="Rectangle 28">
+            <a:extLst>
+              <a:ext uri="{FF2B5EF4-FFF2-40B4-BE49-F238E27FC236}">
+                <a16:creationId xmlns:a16="http://schemas.microsoft.com/office/drawing/2014/main" id="{B8DA71CD-FE86-88C5-09C7-B70781B849BE}"/>
+              </a:ext>
+            </a:extLst>
+          </p:cNvPr>
+          <p:cNvSpPr/>
+          <p:nvPr/>
+        </p:nvSpPr>
+        <p:spPr>
+          <a:xfrm>
+            <a:off x="3158080" y="2405448"/>
+            <a:ext cx="4482082" cy="3484176"/>
+          </a:xfrm>
+          <a:prstGeom prst="rect">
+            <a:avLst/>
+          </a:prstGeom>
+          <a:solidFill>
+            <a:schemeClr val="bg1">
+              <a:lumMod val="95000"/>
+            </a:schemeClr>
+          </a:solidFill>
+          <a:ln>
+            <a:noFill/>
+          </a:ln>
+        </p:spPr>
+        <p:style>
+          <a:lnRef idx="2">
+            <a:schemeClr val="accent1">
+              <a:shade val="15000"/>
+            </a:schemeClr>
+          </a:lnRef>
+          <a:fillRef idx="1">
+            <a:schemeClr val="accent1"/>
+          </a:fillRef>
+          <a:effectRef idx="0">
+            <a:schemeClr val="accent1"/>
+          </a:effectRef>
+          <a:fontRef idx="minor">
+            <a:schemeClr val="lt1"/>
+          </a:fontRef>
+        </p:style>
+        <p:txBody>
+          <a:bodyPr rtlCol="0" anchor="ctr"/>
+          <a:lstStyle/>
+          <a:p>
+            <a:pPr algn="ctr"/>
+            <a:endParaRPr lang="en-US"/>
+          </a:p>
+        </p:txBody>
+      </p:sp>
+      <p:sp>
+        <p:nvSpPr>
           <p:cNvPr id="2" name="Text 0"/>
           <p:cNvSpPr/>
           <p:nvPr/>
         </p:nvSpPr>
         <p:spPr>
           <a:xfrm>
-            <a:off x="609585" y="609600"/>
-            <a:ext cx="11582110" cy="198041"/>
+            <a:off x="897886" y="1524518"/>
+            <a:ext cx="9514718" cy="198041"/>
           </a:xfrm>
           <a:prstGeom prst="rect">
             <a:avLst/>
@@ -1894,7 +2269,7 @@
                 <a:ea typeface="Red Hat Mono Medium" pitchFamily="34" charset="-122"/>
                 <a:cs typeface="Red Hat Mono Medium" pitchFamily="34" charset="-120"/>
               </a:rPr>
-              <a:t>DATASET</a:t>
+              <a:t>THREE OFFICIAL RECORDS :</a:t>
             </a:r>
             <a:endParaRPr lang="en-US" sz="1200" dirty="0"/>
           </a:p>
@@ -1908,8 +2283,8 @@
         </p:nvSpPr>
         <p:spPr>
           <a:xfrm>
-            <a:off x="609585" y="890191"/>
-            <a:ext cx="10972526" cy="410170"/>
+            <a:off x="897886" y="1889628"/>
+            <a:ext cx="10244969" cy="410170"/>
           </a:xfrm>
           <a:prstGeom prst="rect">
             <a:avLst/>
@@ -1928,7 +2303,7 @@
               <a:buNone/>
             </a:pPr>
             <a:r>
-              <a:rPr lang="en-US" sz="3400" dirty="0">
+              <a:rPr lang="en-US" sz="3000" dirty="0">
                 <a:solidFill>
                   <a:srgbClr val="111111"/>
                 </a:solidFill>
@@ -1936,9 +2311,9 @@
                 <a:ea typeface="Big Shoulders ExtraBold" pitchFamily="34" charset="-122"/>
                 <a:cs typeface="Big Shoulders ExtraBold" pitchFamily="34" charset="-120"/>
               </a:rPr>
-              <a:t>OFFICIAL RECORDS on PRODUCTION, PROCESSING &amp; TRADE</a:t>
-            </a:r>
-            <a:endParaRPr lang="en-US" sz="3400" dirty="0"/>
+              <a:t>GREEN COFFEE PRODUCTION, PROCESSED GREEN BEANS, AND TRADE</a:t>
+            </a:r>
+            <a:endParaRPr lang="en-US" sz="3000" dirty="0"/>
           </a:p>
         </p:txBody>
       </p:sp>
@@ -1950,8 +2325,816 @@
         </p:nvSpPr>
         <p:spPr>
           <a:xfrm>
-            <a:off x="609585" y="1899920"/>
-            <a:ext cx="3657509" cy="3989705"/>
+            <a:off x="799072" y="2405449"/>
+            <a:ext cx="2359008" cy="3484176"/>
+          </a:xfrm>
+          <a:custGeom>
+            <a:avLst/>
+            <a:gdLst/>
+            <a:ahLst/>
+            <a:cxnLst/>
+            <a:rect l="l" t="t" r="r" b="b"/>
+            <a:pathLst>
+              <a:path w="3657509" h="4411464">
+                <a:moveTo>
+                  <a:pt x="71118" y="0"/>
+                </a:moveTo>
+                <a:lnTo>
+                  <a:pt x="3657509" y="0"/>
+                </a:lnTo>
+                <a:lnTo>
+                  <a:pt x="3657509" y="4411464"/>
+                </a:lnTo>
+                <a:lnTo>
+                  <a:pt x="71118" y="4411464"/>
+                </a:lnTo>
+                <a:arcTo wR="71118" hR="71120" stAng="5400000" swAng="5400000"/>
+                <a:lnTo>
+                  <a:pt x="0" y="71120"/>
+                </a:lnTo>
+                <a:arcTo wR="71118" hR="71120" stAng="10800000" swAng="5400000"/>
+                <a:close/>
+              </a:path>
+            </a:pathLst>
+          </a:custGeom>
+          <a:solidFill>
+            <a:schemeClr val="bg1">
+              <a:lumMod val="95000"/>
+            </a:schemeClr>
+          </a:solidFill>
+          <a:ln/>
+        </p:spPr>
+        <p:txBody>
+          <a:bodyPr/>
+          <a:lstStyle/>
+          <a:p>
+            <a:endParaRPr lang="en-US"/>
+          </a:p>
+        </p:txBody>
+      </p:sp>
+      <p:sp>
+        <p:nvSpPr>
+          <p:cNvPr id="5" name="Text 3"/>
+          <p:cNvSpPr/>
+          <p:nvPr/>
+        </p:nvSpPr>
+        <p:spPr>
+          <a:xfrm>
+            <a:off x="1273893" y="3230721"/>
+            <a:ext cx="1059614" cy="804664"/>
+          </a:xfrm>
+          <a:prstGeom prst="rect">
+            <a:avLst/>
+          </a:prstGeom>
+          <a:noFill/>
+          <a:ln/>
+        </p:spPr>
+        <p:txBody>
+          <a:bodyPr wrap="none" lIns="0" tIns="0" rIns="0" bIns="0" rtlCol="0" anchor="t"/>
+          <a:lstStyle/>
+          <a:p>
+            <a:pPr marL="0" indent="0" algn="l">
+              <a:lnSpc>
+                <a:spcPct val="73000"/>
+              </a:lnSpc>
+              <a:buNone/>
+            </a:pPr>
+            <a:r>
+              <a:rPr lang="en-US" sz="7200" kern="0" spc="72" dirty="0">
+                <a:solidFill>
+                  <a:srgbClr val="202020"/>
+                </a:solidFill>
+                <a:latin typeface="Big Shoulders ExtraBold" pitchFamily="34" charset="0"/>
+                <a:ea typeface="Big Shoulders ExtraBold" pitchFamily="34" charset="-122"/>
+                <a:cs typeface="Big Shoulders ExtraBold" pitchFamily="34" charset="-120"/>
+              </a:rPr>
+              <a:t>64</a:t>
+            </a:r>
+            <a:endParaRPr lang="en-US" sz="7200" dirty="0"/>
+          </a:p>
+        </p:txBody>
+      </p:sp>
+      <p:sp>
+        <p:nvSpPr>
+          <p:cNvPr id="6" name="Text 4"/>
+          <p:cNvSpPr/>
+          <p:nvPr/>
+        </p:nvSpPr>
+        <p:spPr>
+          <a:xfrm>
+            <a:off x="1385186" y="4238585"/>
+            <a:ext cx="1389600" cy="568920"/>
+          </a:xfrm>
+          <a:prstGeom prst="rect">
+            <a:avLst/>
+          </a:prstGeom>
+          <a:noFill/>
+          <a:ln/>
+        </p:spPr>
+        <p:txBody>
+          <a:bodyPr wrap="square" lIns="0" tIns="0" rIns="0" bIns="0" rtlCol="0" anchor="t">
+            <a:normAutofit/>
+          </a:bodyPr>
+          <a:lstStyle/>
+          <a:p>
+            <a:pPr marL="0" indent="0" algn="l">
+              <a:lnSpc>
+                <a:spcPct val="117000"/>
+              </a:lnSpc>
+              <a:buNone/>
+            </a:pPr>
+            <a:r>
+              <a:rPr lang="en-US" sz="1600" b="1" dirty="0">
+                <a:solidFill>
+                  <a:srgbClr val="202020"/>
+                </a:solidFill>
+                <a:latin typeface="Schibsted Grotesk Bold" pitchFamily="34" charset="0"/>
+                <a:ea typeface="Schibsted Grotesk Bold" pitchFamily="34" charset="-122"/>
+                <a:cs typeface="Schibsted Grotesk Bold" pitchFamily="34" charset="-120"/>
+              </a:rPr>
+              <a:t>years</a:t>
+            </a:r>
+            <a:endParaRPr lang="en-US" sz="1600" dirty="0"/>
+          </a:p>
+          <a:p>
+            <a:pPr marL="0" indent="0" algn="l">
+              <a:lnSpc>
+                <a:spcPct val="117000"/>
+              </a:lnSpc>
+              <a:buNone/>
+            </a:pPr>
+            <a:r>
+              <a:rPr lang="en-US" sz="1600" dirty="0">
+                <a:solidFill>
+                  <a:srgbClr val="202020"/>
+                </a:solidFill>
+                <a:latin typeface="Schibsted Grotesk" pitchFamily="34" charset="0"/>
+                <a:ea typeface="Schibsted Grotesk" pitchFamily="34" charset="-122"/>
+                <a:cs typeface="Schibsted Grotesk" pitchFamily="34" charset="-120"/>
+              </a:rPr>
+              <a:t>1961–2024</a:t>
+            </a:r>
+            <a:endParaRPr lang="en-US" sz="1600" dirty="0"/>
+          </a:p>
+        </p:txBody>
+      </p:sp>
+      <p:sp>
+        <p:nvSpPr>
+          <p:cNvPr id="8" name="Text 6"/>
+          <p:cNvSpPr/>
+          <p:nvPr/>
+        </p:nvSpPr>
+        <p:spPr>
+          <a:xfrm>
+            <a:off x="3908740" y="3230721"/>
+            <a:ext cx="3149521" cy="804664"/>
+          </a:xfrm>
+          <a:prstGeom prst="rect">
+            <a:avLst/>
+          </a:prstGeom>
+          <a:noFill/>
+          <a:ln/>
+        </p:spPr>
+        <p:txBody>
+          <a:bodyPr wrap="none" lIns="0" tIns="0" rIns="0" bIns="0" rtlCol="0" anchor="t"/>
+          <a:lstStyle/>
+          <a:p>
+            <a:pPr marL="0" indent="0" algn="l">
+              <a:lnSpc>
+                <a:spcPct val="73000"/>
+              </a:lnSpc>
+              <a:buNone/>
+            </a:pPr>
+            <a:r>
+              <a:rPr lang="en-US" sz="7200" kern="0" spc="72" dirty="0">
+                <a:solidFill>
+                  <a:srgbClr val="202020"/>
+                </a:solidFill>
+                <a:latin typeface="Big Shoulders ExtraBold" pitchFamily="34" charset="0"/>
+                <a:ea typeface="Big Shoulders ExtraBold" pitchFamily="34" charset="-122"/>
+                <a:cs typeface="Big Shoulders ExtraBold" pitchFamily="34" charset="-120"/>
+              </a:rPr>
+              <a:t>203</a:t>
+            </a:r>
+            <a:endParaRPr lang="en-US" sz="7200" dirty="0"/>
+          </a:p>
+        </p:txBody>
+      </p:sp>
+      <p:sp>
+        <p:nvSpPr>
+          <p:cNvPr id="9" name="Text 7"/>
+          <p:cNvSpPr/>
+          <p:nvPr/>
+        </p:nvSpPr>
+        <p:spPr>
+          <a:xfrm>
+            <a:off x="3908740" y="4238585"/>
+            <a:ext cx="3149521" cy="568920"/>
+          </a:xfrm>
+          <a:prstGeom prst="rect">
+            <a:avLst/>
+          </a:prstGeom>
+          <a:noFill/>
+          <a:ln/>
+        </p:spPr>
+        <p:txBody>
+          <a:bodyPr wrap="square" lIns="0" tIns="0" rIns="0" bIns="0" rtlCol="0" anchor="t">
+            <a:normAutofit/>
+          </a:bodyPr>
+          <a:lstStyle/>
+          <a:p>
+            <a:pPr marL="0" indent="0" algn="l">
+              <a:lnSpc>
+                <a:spcPct val="117000"/>
+              </a:lnSpc>
+              <a:buNone/>
+            </a:pPr>
+            <a:r>
+              <a:rPr lang="en-US" sz="1600" b="1" dirty="0">
+                <a:solidFill>
+                  <a:srgbClr val="202020"/>
+                </a:solidFill>
+                <a:latin typeface="Schibsted Grotesk Bold" pitchFamily="34" charset="0"/>
+                <a:ea typeface="Schibsted Grotesk Bold" pitchFamily="34" charset="-122"/>
+                <a:cs typeface="Schibsted Grotesk Bold" pitchFamily="34" charset="-120"/>
+              </a:rPr>
+              <a:t>countries</a:t>
+            </a:r>
+            <a:endParaRPr lang="en-US" sz="1600" dirty="0"/>
+          </a:p>
+          <a:p>
+            <a:pPr marL="0" indent="0" algn="l">
+              <a:lnSpc>
+                <a:spcPct val="117000"/>
+              </a:lnSpc>
+              <a:buNone/>
+            </a:pPr>
+            <a:r>
+              <a:rPr lang="en-US" sz="1600" dirty="0">
+                <a:solidFill>
+                  <a:srgbClr val="202020"/>
+                </a:solidFill>
+                <a:latin typeface="Schibsted Grotesk" pitchFamily="34" charset="0"/>
+                <a:ea typeface="Schibsted Grotesk" pitchFamily="34" charset="-122"/>
+                <a:cs typeface="Schibsted Grotesk" pitchFamily="34" charset="-120"/>
+              </a:rPr>
+              <a:t>represented in the coffee chain</a:t>
+            </a:r>
+            <a:endParaRPr lang="en-US" sz="1600" dirty="0"/>
+          </a:p>
+        </p:txBody>
+      </p:sp>
+      <p:sp>
+        <p:nvSpPr>
+          <p:cNvPr id="10" name="Shape 8"/>
+          <p:cNvSpPr/>
+          <p:nvPr/>
+        </p:nvSpPr>
+        <p:spPr>
+          <a:xfrm>
+            <a:off x="7633651" y="2405448"/>
+            <a:ext cx="3657509" cy="3484176"/>
+          </a:xfrm>
+          <a:custGeom>
+            <a:avLst/>
+            <a:gdLst/>
+            <a:ahLst/>
+            <a:cxnLst/>
+            <a:rect l="l" t="t" r="r" b="b"/>
+            <a:pathLst>
+              <a:path w="3657509" h="4411464">
+                <a:moveTo>
+                  <a:pt x="0" y="0"/>
+                </a:moveTo>
+                <a:lnTo>
+                  <a:pt x="3586390" y="0"/>
+                </a:lnTo>
+                <a:arcTo wR="71118" hR="71120" stAng="16200000" swAng="5400000"/>
+                <a:lnTo>
+                  <a:pt x="3657509" y="4340344"/>
+                </a:lnTo>
+                <a:arcTo wR="71118" hR="71120" stAng="0" swAng="5400000"/>
+                <a:lnTo>
+                  <a:pt x="0" y="4411464"/>
+                </a:lnTo>
+                <a:lnTo>
+                  <a:pt x="0" y="0"/>
+                </a:lnTo>
+                <a:close/>
+              </a:path>
+            </a:pathLst>
+          </a:custGeom>
+          <a:solidFill>
+            <a:schemeClr val="bg1">
+              <a:lumMod val="95000"/>
+            </a:schemeClr>
+          </a:solidFill>
+          <a:ln/>
+        </p:spPr>
+        <p:txBody>
+          <a:bodyPr/>
+          <a:lstStyle/>
+          <a:p>
+            <a:endParaRPr lang="en-US"/>
+          </a:p>
+        </p:txBody>
+      </p:sp>
+      <p:sp>
+        <p:nvSpPr>
+          <p:cNvPr id="11" name="Text 9"/>
+          <p:cNvSpPr/>
+          <p:nvPr/>
+        </p:nvSpPr>
+        <p:spPr>
+          <a:xfrm>
+            <a:off x="8141639" y="3230721"/>
+            <a:ext cx="3149521" cy="804664"/>
+          </a:xfrm>
+          <a:prstGeom prst="rect">
+            <a:avLst/>
+          </a:prstGeom>
+          <a:noFill/>
+          <a:ln/>
+        </p:spPr>
+        <p:txBody>
+          <a:bodyPr wrap="none" lIns="0" tIns="0" rIns="0" bIns="0" rtlCol="0" anchor="t"/>
+          <a:lstStyle/>
+          <a:p>
+            <a:pPr marL="0" indent="0" algn="l">
+              <a:lnSpc>
+                <a:spcPct val="73000"/>
+              </a:lnSpc>
+              <a:buNone/>
+            </a:pPr>
+            <a:r>
+              <a:rPr lang="en-US" sz="7200" kern="0" spc="72" dirty="0">
+                <a:solidFill>
+                  <a:srgbClr val="202020"/>
+                </a:solidFill>
+                <a:latin typeface="Big Shoulders ExtraBold" pitchFamily="34" charset="0"/>
+                <a:ea typeface="Big Shoulders ExtraBold" pitchFamily="34" charset="-122"/>
+                <a:cs typeface="Big Shoulders ExtraBold" pitchFamily="34" charset="-120"/>
+              </a:rPr>
+              <a:t>41,179</a:t>
+            </a:r>
+            <a:endParaRPr lang="en-US" sz="7200" dirty="0"/>
+          </a:p>
+        </p:txBody>
+      </p:sp>
+      <p:sp>
+        <p:nvSpPr>
+          <p:cNvPr id="12" name="Text 10"/>
+          <p:cNvSpPr/>
+          <p:nvPr/>
+        </p:nvSpPr>
+        <p:spPr>
+          <a:xfrm>
+            <a:off x="8141639" y="4238585"/>
+            <a:ext cx="3149521" cy="853380"/>
+          </a:xfrm>
+          <a:prstGeom prst="rect">
+            <a:avLst/>
+          </a:prstGeom>
+          <a:noFill/>
+          <a:ln/>
+        </p:spPr>
+        <p:txBody>
+          <a:bodyPr wrap="square" lIns="0" tIns="0" rIns="0" bIns="0" rtlCol="0" anchor="t">
+            <a:normAutofit/>
+          </a:bodyPr>
+          <a:lstStyle/>
+          <a:p>
+            <a:pPr marL="0" indent="0" algn="l">
+              <a:lnSpc>
+                <a:spcPct val="117000"/>
+              </a:lnSpc>
+              <a:buNone/>
+            </a:pPr>
+            <a:r>
+              <a:rPr lang="en-US" sz="1600" b="1" dirty="0">
+                <a:solidFill>
+                  <a:srgbClr val="202020"/>
+                </a:solidFill>
+                <a:latin typeface="Schibsted Grotesk Bold" pitchFamily="34" charset="0"/>
+                <a:ea typeface="Schibsted Grotesk Bold" pitchFamily="34" charset="-122"/>
+                <a:cs typeface="Schibsted Grotesk Bold" pitchFamily="34" charset="-120"/>
+              </a:rPr>
+              <a:t>official values</a:t>
+            </a:r>
+            <a:endParaRPr lang="en-US" sz="1600" dirty="0"/>
+          </a:p>
+          <a:p>
+            <a:pPr marL="0" indent="0" algn="l">
+              <a:lnSpc>
+                <a:spcPct val="117000"/>
+              </a:lnSpc>
+              <a:buNone/>
+            </a:pPr>
+            <a:r>
+              <a:rPr lang="en-US" sz="1600" dirty="0">
+                <a:solidFill>
+                  <a:srgbClr val="202020"/>
+                </a:solidFill>
+                <a:latin typeface="Schibsted Grotesk" pitchFamily="34" charset="0"/>
+                <a:ea typeface="Schibsted Grotesk" pitchFamily="34" charset="-122"/>
+                <a:cs typeface="Schibsted Grotesk" pitchFamily="34" charset="-120"/>
+              </a:rPr>
+              <a:t>8,082 production rows</a:t>
+            </a:r>
+          </a:p>
+          <a:p>
+            <a:pPr marL="0" indent="0" algn="l">
+              <a:lnSpc>
+                <a:spcPct val="117000"/>
+              </a:lnSpc>
+              <a:buNone/>
+            </a:pPr>
+            <a:r>
+              <a:rPr lang="en-US" sz="1600" dirty="0">
+                <a:solidFill>
+                  <a:srgbClr val="202020"/>
+                </a:solidFill>
+                <a:latin typeface="Schibsted Grotesk" pitchFamily="34" charset="0"/>
+                <a:ea typeface="Schibsted Grotesk" pitchFamily="34" charset="-122"/>
+                <a:cs typeface="Schibsted Grotesk" pitchFamily="34" charset="-120"/>
+              </a:rPr>
+              <a:t>33,097 trade rows</a:t>
+            </a:r>
+            <a:endParaRPr lang="en-US" sz="1600" dirty="0"/>
+          </a:p>
+        </p:txBody>
+      </p:sp>
+      <p:sp>
+        <p:nvSpPr>
+          <p:cNvPr id="13" name="Text 11"/>
+          <p:cNvSpPr/>
+          <p:nvPr/>
+        </p:nvSpPr>
+        <p:spPr>
+          <a:xfrm>
+            <a:off x="799072" y="5943170"/>
+            <a:ext cx="10651519" cy="187840"/>
+          </a:xfrm>
+          <a:prstGeom prst="rect">
+            <a:avLst/>
+          </a:prstGeom>
+          <a:noFill/>
+          <a:ln/>
+        </p:spPr>
+        <p:txBody>
+          <a:bodyPr wrap="none" lIns="0" tIns="0" rIns="0" bIns="0" rtlCol="0" anchor="t"/>
+          <a:lstStyle/>
+          <a:p>
+            <a:pPr marL="0" indent="0" algn="l">
+              <a:lnSpc>
+                <a:spcPct val="108000"/>
+              </a:lnSpc>
+              <a:buNone/>
+            </a:pPr>
+            <a:r>
+              <a:rPr lang="en-US" sz="1250" kern="0" spc="50" dirty="0">
+                <a:solidFill>
+                  <a:schemeClr val="bg1">
+                    <a:lumMod val="65000"/>
+                  </a:schemeClr>
+                </a:solidFill>
+                <a:latin typeface="Red Hat Mono Medium" pitchFamily="34" charset="0"/>
+                <a:ea typeface="Red Hat Mono Medium" pitchFamily="34" charset="-122"/>
+                <a:cs typeface="Red Hat Mono Medium" pitchFamily="34" charset="-120"/>
+              </a:rPr>
+              <a:t>SOURCE: FAOSTAT ANALYTICAL DATA.</a:t>
+            </a:r>
+            <a:endParaRPr lang="en-US" sz="1250" dirty="0">
+              <a:solidFill>
+                <a:schemeClr val="bg1">
+                  <a:lumMod val="65000"/>
+                </a:schemeClr>
+              </a:solidFill>
+            </a:endParaRPr>
+          </a:p>
+        </p:txBody>
+      </p:sp>
+      <p:cxnSp>
+        <p:nvCxnSpPr>
+          <p:cNvPr id="17" name="Straight Connector 16">
+            <a:extLst>
+              <a:ext uri="{FF2B5EF4-FFF2-40B4-BE49-F238E27FC236}">
+                <a16:creationId xmlns:a16="http://schemas.microsoft.com/office/drawing/2014/main" id="{4882A1BC-5308-6D87-F2E4-F5ABA53A0570}"/>
+              </a:ext>
+            </a:extLst>
+          </p:cNvPr>
+          <p:cNvCxnSpPr>
+            <a:cxnSpLocks/>
+          </p:cNvCxnSpPr>
+          <p:nvPr/>
+        </p:nvCxnSpPr>
+        <p:spPr>
+          <a:xfrm>
+            <a:off x="3158080" y="2405449"/>
+            <a:ext cx="0" cy="3484176"/>
+          </a:xfrm>
+          <a:prstGeom prst="line">
+            <a:avLst/>
+          </a:prstGeom>
+        </p:spPr>
+        <p:style>
+          <a:lnRef idx="1">
+            <a:schemeClr val="dk1"/>
+          </a:lnRef>
+          <a:fillRef idx="0">
+            <a:schemeClr val="dk1"/>
+          </a:fillRef>
+          <a:effectRef idx="0">
+            <a:schemeClr val="dk1"/>
+          </a:effectRef>
+          <a:fontRef idx="minor">
+            <a:schemeClr val="tx1"/>
+          </a:fontRef>
+        </p:style>
+      </p:cxnSp>
+      <p:cxnSp>
+        <p:nvCxnSpPr>
+          <p:cNvPr id="18" name="Straight Connector 17">
+            <a:extLst>
+              <a:ext uri="{FF2B5EF4-FFF2-40B4-BE49-F238E27FC236}">
+                <a16:creationId xmlns:a16="http://schemas.microsoft.com/office/drawing/2014/main" id="{383E9D21-837C-EE4C-12F6-FB31C7E40601}"/>
+              </a:ext>
+            </a:extLst>
+          </p:cNvPr>
+          <p:cNvCxnSpPr>
+            <a:cxnSpLocks/>
+          </p:cNvCxnSpPr>
+          <p:nvPr/>
+        </p:nvCxnSpPr>
+        <p:spPr>
+          <a:xfrm>
+            <a:off x="7633651" y="2405449"/>
+            <a:ext cx="0" cy="3494044"/>
+          </a:xfrm>
+          <a:prstGeom prst="line">
+            <a:avLst/>
+          </a:prstGeom>
+        </p:spPr>
+        <p:style>
+          <a:lnRef idx="1">
+            <a:schemeClr val="dk1"/>
+          </a:lnRef>
+          <a:fillRef idx="0">
+            <a:schemeClr val="dk1"/>
+          </a:fillRef>
+          <a:effectRef idx="0">
+            <a:schemeClr val="dk1"/>
+          </a:effectRef>
+          <a:fontRef idx="minor">
+            <a:schemeClr val="tx1"/>
+          </a:fontRef>
+        </p:style>
+      </p:cxnSp>
+      <p:sp>
+        <p:nvSpPr>
+          <p:cNvPr id="30" name="TextBox 29">
+            <a:extLst>
+              <a:ext uri="{FF2B5EF4-FFF2-40B4-BE49-F238E27FC236}">
+                <a16:creationId xmlns:a16="http://schemas.microsoft.com/office/drawing/2014/main" id="{006C2171-39BE-389A-4472-1C41E4D72E46}"/>
+              </a:ext>
+            </a:extLst>
+          </p:cNvPr>
+          <p:cNvSpPr txBox="1"/>
+          <p:nvPr/>
+        </p:nvSpPr>
+        <p:spPr>
+          <a:xfrm>
+            <a:off x="0" y="6617362"/>
+            <a:ext cx="12192000" cy="236155"/>
+          </a:xfrm>
+          <a:prstGeom prst="rect">
+            <a:avLst/>
+          </a:prstGeom>
+          <a:noFill/>
+        </p:spPr>
+        <p:txBody>
+          <a:bodyPr wrap="square">
+            <a:spAutoFit/>
+          </a:bodyPr>
+          <a:lstStyle/>
+          <a:p>
+            <a:pPr algn="ctr">
+              <a:lnSpc>
+                <a:spcPct val="108000"/>
+              </a:lnSpc>
+            </a:pPr>
+            <a:r>
+              <a:rPr lang="en-US" sz="900" kern="0" spc="50" dirty="0">
+                <a:solidFill>
+                  <a:schemeClr val="bg2">
+                    <a:lumMod val="90000"/>
+                  </a:schemeClr>
+                </a:solidFill>
+                <a:latin typeface="Red Hat Mono Medium" pitchFamily="34" charset="0"/>
+                <a:ea typeface="Red Hat Mono Medium" pitchFamily="34" charset="-122"/>
+                <a:cs typeface="Red Hat Mono Medium" pitchFamily="34" charset="-120"/>
+              </a:rPr>
+              <a:t>EDA &amp; SQL PROJECT PRESENTATION by RIZKI FIRDAUS</a:t>
+            </a:r>
+            <a:endParaRPr lang="en-US" sz="900" dirty="0">
+              <a:solidFill>
+                <a:schemeClr val="bg2">
+                  <a:lumMod val="90000"/>
+                </a:schemeClr>
+              </a:solidFill>
+            </a:endParaRPr>
+          </a:p>
+        </p:txBody>
+      </p:sp>
+      <p:sp>
+        <p:nvSpPr>
+          <p:cNvPr id="31" name="TextBox 30">
+            <a:extLst>
+              <a:ext uri="{FF2B5EF4-FFF2-40B4-BE49-F238E27FC236}">
+                <a16:creationId xmlns:a16="http://schemas.microsoft.com/office/drawing/2014/main" id="{859F53A0-0D18-6DDE-484A-E2B96E5FD7CB}"/>
+              </a:ext>
+            </a:extLst>
+          </p:cNvPr>
+          <p:cNvSpPr txBox="1"/>
+          <p:nvPr/>
+        </p:nvSpPr>
+        <p:spPr>
+          <a:xfrm rot="16200000">
+            <a:off x="-3291204" y="3313584"/>
+            <a:ext cx="6858002" cy="230832"/>
+          </a:xfrm>
+          <a:prstGeom prst="rect">
+            <a:avLst/>
+          </a:prstGeom>
+          <a:noFill/>
+        </p:spPr>
+        <p:txBody>
+          <a:bodyPr wrap="square" rtlCol="0">
+            <a:spAutoFit/>
+          </a:bodyPr>
+          <a:lstStyle/>
+          <a:p>
+            <a:pPr algn="ctr"/>
+            <a:r>
+              <a:rPr lang="en-US" sz="900" kern="0" spc="50" dirty="0">
+                <a:solidFill>
+                  <a:schemeClr val="bg2">
+                    <a:lumMod val="90000"/>
+                  </a:schemeClr>
+                </a:solidFill>
+                <a:latin typeface="Red Hat Mono Medium" pitchFamily="34" charset="0"/>
+                <a:ea typeface="Red Hat Mono Medium" pitchFamily="34" charset="-122"/>
+                <a:cs typeface="Red Hat Mono Medium" pitchFamily="34" charset="-120"/>
+              </a:rPr>
+              <a:t>IRONHACK | WEEK 3 | PROJECT 1</a:t>
+            </a:r>
+            <a:endParaRPr lang="en-US" sz="900" dirty="0"/>
+          </a:p>
+        </p:txBody>
+      </p:sp>
+      <p:sp>
+        <p:nvSpPr>
+          <p:cNvPr id="32" name="TextBox 31">
+            <a:extLst>
+              <a:ext uri="{FF2B5EF4-FFF2-40B4-BE49-F238E27FC236}">
+                <a16:creationId xmlns:a16="http://schemas.microsoft.com/office/drawing/2014/main" id="{B26BC385-605E-AF78-D02A-7273F3801F69}"/>
+              </a:ext>
+            </a:extLst>
+          </p:cNvPr>
+          <p:cNvSpPr txBox="1"/>
+          <p:nvPr/>
+        </p:nvSpPr>
+        <p:spPr>
+          <a:xfrm>
+            <a:off x="0" y="20750"/>
+            <a:ext cx="12192000" cy="236155"/>
+          </a:xfrm>
+          <a:prstGeom prst="rect">
+            <a:avLst/>
+          </a:prstGeom>
+          <a:noFill/>
+        </p:spPr>
+        <p:txBody>
+          <a:bodyPr wrap="square">
+            <a:spAutoFit/>
+          </a:bodyPr>
+          <a:lstStyle/>
+          <a:p>
+            <a:pPr algn="ctr">
+              <a:lnSpc>
+                <a:spcPct val="108000"/>
+              </a:lnSpc>
+            </a:pPr>
+            <a:r>
+              <a:rPr lang="en-US" sz="900" kern="0" spc="50" dirty="0">
+                <a:solidFill>
+                  <a:schemeClr val="bg2">
+                    <a:lumMod val="90000"/>
+                  </a:schemeClr>
+                </a:solidFill>
+                <a:latin typeface="Red Hat Mono Medium" pitchFamily="34" charset="0"/>
+                <a:ea typeface="Red Hat Mono Medium" pitchFamily="34" charset="-122"/>
+                <a:cs typeface="Red Hat Mono Medium" pitchFamily="34" charset="-120"/>
+              </a:rPr>
+              <a:t>- COFFEE LAND VS PRICE -</a:t>
+            </a:r>
+            <a:endParaRPr lang="en-US" sz="900" dirty="0">
+              <a:solidFill>
+                <a:schemeClr val="bg2">
+                  <a:lumMod val="90000"/>
+                </a:schemeClr>
+              </a:solidFill>
+            </a:endParaRPr>
+          </a:p>
+        </p:txBody>
+      </p:sp>
+      <p:sp>
+        <p:nvSpPr>
+          <p:cNvPr id="34" name="TextBox 33">
+            <a:extLst>
+              <a:ext uri="{FF2B5EF4-FFF2-40B4-BE49-F238E27FC236}">
+                <a16:creationId xmlns:a16="http://schemas.microsoft.com/office/drawing/2014/main" id="{7ED73245-D46A-C29A-0000-F50E2CA0CA39}"/>
+              </a:ext>
+            </a:extLst>
+          </p:cNvPr>
+          <p:cNvSpPr txBox="1"/>
+          <p:nvPr/>
+        </p:nvSpPr>
+        <p:spPr>
+          <a:xfrm rot="5400000">
+            <a:off x="8626826" y="3313584"/>
+            <a:ext cx="6858002" cy="230832"/>
+          </a:xfrm>
+          <a:prstGeom prst="rect">
+            <a:avLst/>
+          </a:prstGeom>
+          <a:noFill/>
+        </p:spPr>
+        <p:txBody>
+          <a:bodyPr wrap="square" rtlCol="0">
+            <a:spAutoFit/>
+          </a:bodyPr>
+          <a:lstStyle/>
+          <a:p>
+            <a:pPr algn="ctr"/>
+            <a:r>
+              <a:rPr lang="en-US" sz="900" kern="0" spc="50" dirty="0">
+                <a:solidFill>
+                  <a:schemeClr val="bg2">
+                    <a:lumMod val="90000"/>
+                  </a:schemeClr>
+                </a:solidFill>
+                <a:latin typeface="Red Hat Mono Medium" pitchFamily="34" charset="0"/>
+                <a:ea typeface="Red Hat Mono Medium" pitchFamily="34" charset="-122"/>
+                <a:cs typeface="Red Hat Mono Medium" pitchFamily="34" charset="-120"/>
+              </a:rPr>
+              <a:t>2 OCTOBER 2026</a:t>
+            </a:r>
+            <a:endParaRPr lang="en-US" sz="900" dirty="0"/>
+          </a:p>
+        </p:txBody>
+      </p:sp>
+    </p:spTree>
+  </p:cSld>
+  <p:clrMapOvr>
+    <a:masterClrMapping/>
+  </p:clrMapOvr>
+</p:sld>
+</file>
+
+<file path=ppt/slides/slide4.xml><?xml version="1.0" encoding="utf-8"?>
+<p:sld xmlns:a="http://schemas.openxmlformats.org/drawingml/2006/main" xmlns:r="http://schemas.openxmlformats.org/officeDocument/2006/relationships" xmlns:p="http://schemas.openxmlformats.org/presentationml/2006/main">
+  <p:cSld name="Slide 4">
+    <p:spTree>
+      <p:nvGrpSpPr>
+        <p:cNvPr id="1" name=""/>
+        <p:cNvGrpSpPr/>
+        <p:nvPr/>
+      </p:nvGrpSpPr>
+      <p:grpSpPr>
+        <a:xfrm>
+          <a:off x="0" y="0"/>
+          <a:ext cx="0" cy="0"/>
+          <a:chOff x="0" y="0"/>
+          <a:chExt cx="0" cy="0"/>
+        </a:xfrm>
+      </p:grpSpPr>
+      <p:sp>
+        <p:nvSpPr>
+          <p:cNvPr id="35" name="Shape 2">
+            <a:extLst>
+              <a:ext uri="{FF2B5EF4-FFF2-40B4-BE49-F238E27FC236}">
+                <a16:creationId xmlns:a16="http://schemas.microsoft.com/office/drawing/2014/main" id="{C0B9C4CF-22DF-DFFE-C5D0-07E0C1DA0CD8}"/>
+              </a:ext>
+            </a:extLst>
+          </p:cNvPr>
+          <p:cNvSpPr/>
+          <p:nvPr/>
+        </p:nvSpPr>
+        <p:spPr>
+          <a:xfrm>
+            <a:off x="609585" y="2360471"/>
+            <a:ext cx="3567671" cy="3187453"/>
           </a:xfrm>
           <a:custGeom>
             <a:avLst/>
@@ -1997,412 +3180,14 @@
       </p:sp>
       <p:sp>
         <p:nvSpPr>
-          <p:cNvPr id="5" name="Text 3"/>
+          <p:cNvPr id="2" name="Text 0"/>
           <p:cNvSpPr/>
           <p:nvPr/>
         </p:nvSpPr>
         <p:spPr>
           <a:xfrm>
-            <a:off x="876278" y="2214761"/>
-            <a:ext cx="3149521" cy="804664"/>
-          </a:xfrm>
-          <a:prstGeom prst="rect">
-            <a:avLst/>
-          </a:prstGeom>
-          <a:noFill/>
-          <a:ln/>
-        </p:spPr>
-        <p:txBody>
-          <a:bodyPr wrap="none" lIns="0" tIns="0" rIns="0" bIns="0" rtlCol="0" anchor="t"/>
-          <a:lstStyle/>
-          <a:p>
-            <a:pPr marL="0" indent="0" algn="l">
-              <a:lnSpc>
-                <a:spcPct val="73000"/>
-              </a:lnSpc>
-              <a:buNone/>
-            </a:pPr>
-            <a:r>
-              <a:rPr lang="en-US" sz="7200" kern="0" spc="72" dirty="0">
-                <a:solidFill>
-                  <a:srgbClr val="202020"/>
-                </a:solidFill>
-                <a:latin typeface="Big Shoulders ExtraBold" pitchFamily="34" charset="0"/>
-                <a:ea typeface="Big Shoulders ExtraBold" pitchFamily="34" charset="-122"/>
-                <a:cs typeface="Big Shoulders ExtraBold" pitchFamily="34" charset="-120"/>
-              </a:rPr>
-              <a:t>64</a:t>
-            </a:r>
-            <a:endParaRPr lang="en-US" sz="7200" dirty="0"/>
-          </a:p>
-        </p:txBody>
-      </p:sp>
-      <p:sp>
-        <p:nvSpPr>
-          <p:cNvPr id="6" name="Text 4"/>
-          <p:cNvSpPr/>
-          <p:nvPr/>
-        </p:nvSpPr>
-        <p:spPr>
-          <a:xfrm>
-            <a:off x="876278" y="3222625"/>
-            <a:ext cx="3149521" cy="568920"/>
-          </a:xfrm>
-          <a:prstGeom prst="rect">
-            <a:avLst/>
-          </a:prstGeom>
-          <a:noFill/>
-          <a:ln/>
-        </p:spPr>
-        <p:txBody>
-          <a:bodyPr wrap="square" lIns="0" tIns="0" rIns="0" bIns="0" rtlCol="0" anchor="t">
-            <a:normAutofit/>
-          </a:bodyPr>
-          <a:lstStyle/>
-          <a:p>
-            <a:pPr marL="0" indent="0" algn="l">
-              <a:lnSpc>
-                <a:spcPct val="117000"/>
-              </a:lnSpc>
-              <a:buNone/>
-            </a:pPr>
-            <a:r>
-              <a:rPr lang="en-US" sz="1600" b="1" dirty="0">
-                <a:solidFill>
-                  <a:srgbClr val="202020"/>
-                </a:solidFill>
-                <a:latin typeface="Schibsted Grotesk Bold" pitchFamily="34" charset="0"/>
-                <a:ea typeface="Schibsted Grotesk Bold" pitchFamily="34" charset="-122"/>
-                <a:cs typeface="Schibsted Grotesk Bold" pitchFamily="34" charset="-120"/>
-              </a:rPr>
-              <a:t>years</a:t>
-            </a:r>
-            <a:endParaRPr lang="en-US" sz="1600" dirty="0"/>
-          </a:p>
-          <a:p>
-            <a:pPr marL="0" indent="0" algn="l">
-              <a:lnSpc>
-                <a:spcPct val="117000"/>
-              </a:lnSpc>
-              <a:buNone/>
-            </a:pPr>
-            <a:r>
-              <a:rPr lang="en-US" sz="1600" dirty="0">
-                <a:solidFill>
-                  <a:srgbClr val="202020"/>
-                </a:solidFill>
-                <a:latin typeface="Schibsted Grotesk" pitchFamily="34" charset="0"/>
-                <a:ea typeface="Schibsted Grotesk" pitchFamily="34" charset="-122"/>
-                <a:cs typeface="Schibsted Grotesk" pitchFamily="34" charset="-120"/>
-              </a:rPr>
-              <a:t>1961–2024</a:t>
-            </a:r>
-            <a:endParaRPr lang="en-US" sz="1600" dirty="0"/>
-          </a:p>
-        </p:txBody>
-      </p:sp>
-      <p:sp>
-        <p:nvSpPr>
-          <p:cNvPr id="7" name="Shape 5"/>
-          <p:cNvSpPr/>
-          <p:nvPr/>
-        </p:nvSpPr>
-        <p:spPr>
-          <a:xfrm>
-            <a:off x="4267093" y="1899920"/>
-            <a:ext cx="3657509" cy="3989705"/>
-          </a:xfrm>
-          <a:prstGeom prst="rect">
-            <a:avLst/>
-          </a:prstGeom>
-          <a:solidFill>
-            <a:srgbClr val="FAFAF8"/>
-          </a:solidFill>
-          <a:ln/>
-        </p:spPr>
-        <p:txBody>
-          <a:bodyPr/>
-          <a:lstStyle/>
-          <a:p>
-            <a:endParaRPr lang="en-US"/>
-          </a:p>
-        </p:txBody>
-      </p:sp>
-      <p:sp>
-        <p:nvSpPr>
-          <p:cNvPr id="8" name="Text 6"/>
-          <p:cNvSpPr/>
-          <p:nvPr/>
-        </p:nvSpPr>
-        <p:spPr>
-          <a:xfrm>
-            <a:off x="3753720" y="2214761"/>
-            <a:ext cx="3149521" cy="804664"/>
-          </a:xfrm>
-          <a:prstGeom prst="rect">
-            <a:avLst/>
-          </a:prstGeom>
-          <a:noFill/>
-          <a:ln/>
-        </p:spPr>
-        <p:txBody>
-          <a:bodyPr wrap="none" lIns="0" tIns="0" rIns="0" bIns="0" rtlCol="0" anchor="t"/>
-          <a:lstStyle/>
-          <a:p>
-            <a:pPr marL="0" indent="0" algn="l">
-              <a:lnSpc>
-                <a:spcPct val="73000"/>
-              </a:lnSpc>
-              <a:buNone/>
-            </a:pPr>
-            <a:r>
-              <a:rPr lang="en-US" sz="7200" kern="0" spc="72" dirty="0">
-                <a:solidFill>
-                  <a:srgbClr val="202020"/>
-                </a:solidFill>
-                <a:latin typeface="Big Shoulders ExtraBold" pitchFamily="34" charset="0"/>
-                <a:ea typeface="Big Shoulders ExtraBold" pitchFamily="34" charset="-122"/>
-                <a:cs typeface="Big Shoulders ExtraBold" pitchFamily="34" charset="-120"/>
-              </a:rPr>
-              <a:t>203</a:t>
-            </a:r>
-            <a:endParaRPr lang="en-US" sz="7200" dirty="0"/>
-          </a:p>
-        </p:txBody>
-      </p:sp>
-      <p:sp>
-        <p:nvSpPr>
-          <p:cNvPr id="9" name="Text 7"/>
-          <p:cNvSpPr/>
-          <p:nvPr/>
-        </p:nvSpPr>
-        <p:spPr>
-          <a:xfrm>
-            <a:off x="3753720" y="3222625"/>
-            <a:ext cx="3149521" cy="568920"/>
-          </a:xfrm>
-          <a:prstGeom prst="rect">
-            <a:avLst/>
-          </a:prstGeom>
-          <a:noFill/>
-          <a:ln/>
-        </p:spPr>
-        <p:txBody>
-          <a:bodyPr wrap="square" lIns="0" tIns="0" rIns="0" bIns="0" rtlCol="0" anchor="t">
-            <a:normAutofit/>
-          </a:bodyPr>
-          <a:lstStyle/>
-          <a:p>
-            <a:pPr marL="0" indent="0" algn="l">
-              <a:lnSpc>
-                <a:spcPct val="117000"/>
-              </a:lnSpc>
-              <a:buNone/>
-            </a:pPr>
-            <a:r>
-              <a:rPr lang="en-US" sz="1600" b="1" dirty="0">
-                <a:solidFill>
-                  <a:srgbClr val="202020"/>
-                </a:solidFill>
-                <a:latin typeface="Schibsted Grotesk Bold" pitchFamily="34" charset="0"/>
-                <a:ea typeface="Schibsted Grotesk Bold" pitchFamily="34" charset="-122"/>
-                <a:cs typeface="Schibsted Grotesk Bold" pitchFamily="34" charset="-120"/>
-              </a:rPr>
-              <a:t>countries</a:t>
-            </a:r>
-            <a:endParaRPr lang="en-US" sz="1600" dirty="0"/>
-          </a:p>
-          <a:p>
-            <a:pPr marL="0" indent="0" algn="l">
-              <a:lnSpc>
-                <a:spcPct val="117000"/>
-              </a:lnSpc>
-              <a:buNone/>
-            </a:pPr>
-            <a:r>
-              <a:rPr lang="en-US" sz="1600" dirty="0">
-                <a:solidFill>
-                  <a:srgbClr val="202020"/>
-                </a:solidFill>
-                <a:latin typeface="Schibsted Grotesk" pitchFamily="34" charset="0"/>
-                <a:ea typeface="Schibsted Grotesk" pitchFamily="34" charset="-122"/>
-                <a:cs typeface="Schibsted Grotesk" pitchFamily="34" charset="-120"/>
-              </a:rPr>
-              <a:t>represented in the lookup table</a:t>
-            </a:r>
-            <a:endParaRPr lang="en-US" sz="1600" dirty="0"/>
-          </a:p>
-        </p:txBody>
-      </p:sp>
-      <p:sp>
-        <p:nvSpPr>
-          <p:cNvPr id="10" name="Shape 8"/>
-          <p:cNvSpPr/>
-          <p:nvPr/>
-        </p:nvSpPr>
-        <p:spPr>
-          <a:xfrm>
-            <a:off x="7924602" y="1899920"/>
-            <a:ext cx="3657509" cy="3989705"/>
-          </a:xfrm>
-          <a:custGeom>
-            <a:avLst/>
-            <a:gdLst/>
-            <a:ahLst/>
-            <a:cxnLst/>
-            <a:rect l="l" t="t" r="r" b="b"/>
-            <a:pathLst>
-              <a:path w="3657509" h="4411464">
-                <a:moveTo>
-                  <a:pt x="0" y="0"/>
-                </a:moveTo>
-                <a:lnTo>
-                  <a:pt x="3586390" y="0"/>
-                </a:lnTo>
-                <a:arcTo wR="71118" hR="71120" stAng="16200000" swAng="5400000"/>
-                <a:lnTo>
-                  <a:pt x="3657509" y="4340344"/>
-                </a:lnTo>
-                <a:arcTo wR="71118" hR="71120" stAng="0" swAng="5400000"/>
-                <a:lnTo>
-                  <a:pt x="0" y="4411464"/>
-                </a:lnTo>
-                <a:lnTo>
-                  <a:pt x="0" y="0"/>
-                </a:lnTo>
-                <a:close/>
-              </a:path>
-            </a:pathLst>
-          </a:custGeom>
-          <a:solidFill>
-            <a:srgbClr val="FAFAF8"/>
-          </a:solidFill>
-          <a:ln/>
-        </p:spPr>
-        <p:txBody>
-          <a:bodyPr/>
-          <a:lstStyle/>
-          <a:p>
-            <a:endParaRPr lang="en-US"/>
-          </a:p>
-        </p:txBody>
-      </p:sp>
-      <p:sp>
-        <p:nvSpPr>
-          <p:cNvPr id="11" name="Text 9"/>
-          <p:cNvSpPr/>
-          <p:nvPr/>
-        </p:nvSpPr>
-        <p:spPr>
-          <a:xfrm>
-            <a:off x="7919218" y="2214761"/>
-            <a:ext cx="3149521" cy="804664"/>
-          </a:xfrm>
-          <a:prstGeom prst="rect">
-            <a:avLst/>
-          </a:prstGeom>
-          <a:noFill/>
-          <a:ln/>
-        </p:spPr>
-        <p:txBody>
-          <a:bodyPr wrap="none" lIns="0" tIns="0" rIns="0" bIns="0" rtlCol="0" anchor="t"/>
-          <a:lstStyle/>
-          <a:p>
-            <a:pPr marL="0" indent="0" algn="l">
-              <a:lnSpc>
-                <a:spcPct val="73000"/>
-              </a:lnSpc>
-              <a:buNone/>
-            </a:pPr>
-            <a:r>
-              <a:rPr lang="en-US" sz="7200" kern="0" spc="72" dirty="0">
-                <a:solidFill>
-                  <a:srgbClr val="202020"/>
-                </a:solidFill>
-                <a:latin typeface="Big Shoulders ExtraBold" pitchFamily="34" charset="0"/>
-                <a:ea typeface="Big Shoulders ExtraBold" pitchFamily="34" charset="-122"/>
-                <a:cs typeface="Big Shoulders ExtraBold" pitchFamily="34" charset="-120"/>
-              </a:rPr>
-              <a:t>41,179</a:t>
-            </a:r>
-            <a:endParaRPr lang="en-US" sz="7200" dirty="0"/>
-          </a:p>
-        </p:txBody>
-      </p:sp>
-      <p:sp>
-        <p:nvSpPr>
-          <p:cNvPr id="12" name="Text 10"/>
-          <p:cNvSpPr/>
-          <p:nvPr/>
-        </p:nvSpPr>
-        <p:spPr>
-          <a:xfrm>
-            <a:off x="7919218" y="3222625"/>
-            <a:ext cx="3149521" cy="853380"/>
-          </a:xfrm>
-          <a:prstGeom prst="rect">
-            <a:avLst/>
-          </a:prstGeom>
-          <a:noFill/>
-          <a:ln/>
-        </p:spPr>
-        <p:txBody>
-          <a:bodyPr wrap="square" lIns="0" tIns="0" rIns="0" bIns="0" rtlCol="0" anchor="t">
-            <a:normAutofit/>
-          </a:bodyPr>
-          <a:lstStyle/>
-          <a:p>
-            <a:pPr marL="0" indent="0" algn="l">
-              <a:lnSpc>
-                <a:spcPct val="117000"/>
-              </a:lnSpc>
-              <a:buNone/>
-            </a:pPr>
-            <a:r>
-              <a:rPr lang="en-US" sz="1600" b="1" dirty="0">
-                <a:solidFill>
-                  <a:srgbClr val="202020"/>
-                </a:solidFill>
-                <a:latin typeface="Schibsted Grotesk Bold" pitchFamily="34" charset="0"/>
-                <a:ea typeface="Schibsted Grotesk Bold" pitchFamily="34" charset="-122"/>
-                <a:cs typeface="Schibsted Grotesk Bold" pitchFamily="34" charset="-120"/>
-              </a:rPr>
-              <a:t>official values</a:t>
-            </a:r>
-            <a:endParaRPr lang="en-US" sz="1600" dirty="0"/>
-          </a:p>
-          <a:p>
-            <a:pPr marL="0" indent="0" algn="l">
-              <a:lnSpc>
-                <a:spcPct val="117000"/>
-              </a:lnSpc>
-              <a:buNone/>
-            </a:pPr>
-            <a:r>
-              <a:rPr lang="en-US" sz="1600" dirty="0">
-                <a:solidFill>
-                  <a:srgbClr val="202020"/>
-                </a:solidFill>
-                <a:latin typeface="Schibsted Grotesk" pitchFamily="34" charset="0"/>
-                <a:ea typeface="Schibsted Grotesk" pitchFamily="34" charset="-122"/>
-                <a:cs typeface="Schibsted Grotesk" pitchFamily="34" charset="-120"/>
-              </a:rPr>
-              <a:t>8,082 production rows · 33,097 trade rows</a:t>
-            </a:r>
-            <a:endParaRPr lang="en-US" sz="1600" dirty="0"/>
-          </a:p>
-        </p:txBody>
-      </p:sp>
-      <p:sp>
-        <p:nvSpPr>
-          <p:cNvPr id="13" name="Text 11"/>
-          <p:cNvSpPr/>
-          <p:nvPr/>
-        </p:nvSpPr>
-        <p:spPr>
-          <a:xfrm>
-            <a:off x="609585" y="6042025"/>
-            <a:ext cx="11582110" cy="206375"/>
+            <a:off x="609585" y="1463100"/>
+            <a:ext cx="10895596" cy="198041"/>
           </a:xfrm>
           <a:prstGeom prst="rect">
             <a:avLst/>
@@ -2421,154 +3206,15 @@
               <a:buNone/>
             </a:pPr>
             <a:r>
-              <a:rPr lang="en-US" sz="1250" kern="0" spc="50" dirty="0">
-                <a:solidFill>
-                  <a:srgbClr val="5A5A5A"/>
+              <a:rPr lang="en-US" sz="1200" kern="0" spc="48" dirty="0">
+                <a:solidFill>
+                  <a:srgbClr val="111111"/>
                 </a:solidFill>
                 <a:latin typeface="Red Hat Mono Medium" pitchFamily="34" charset="0"/>
                 <a:ea typeface="Red Hat Mono Medium" pitchFamily="34" charset="-122"/>
                 <a:cs typeface="Red Hat Mono Medium" pitchFamily="34" charset="-120"/>
               </a:rPr>
-              <a:t>SOURCE: FAOSTAT ANALYTICAL DATA.</a:t>
-            </a:r>
-            <a:endParaRPr lang="en-US" sz="1250" dirty="0"/>
-          </a:p>
-        </p:txBody>
-      </p:sp>
-      <p:cxnSp>
-        <p:nvCxnSpPr>
-          <p:cNvPr id="17" name="Straight Connector 16">
-            <a:extLst>
-              <a:ext uri="{FF2B5EF4-FFF2-40B4-BE49-F238E27FC236}">
-                <a16:creationId xmlns:a16="http://schemas.microsoft.com/office/drawing/2014/main" id="{4882A1BC-5308-6D87-F2E4-F5ABA53A0570}"/>
-              </a:ext>
-            </a:extLst>
-          </p:cNvPr>
-          <p:cNvCxnSpPr/>
-          <p:nvPr/>
-        </p:nvCxnSpPr>
-        <p:spPr>
-          <a:xfrm>
-            <a:off x="3009799" y="1899920"/>
-            <a:ext cx="0" cy="3989705"/>
-          </a:xfrm>
-          <a:prstGeom prst="line">
-            <a:avLst/>
-          </a:prstGeom>
-        </p:spPr>
-        <p:style>
-          <a:lnRef idx="1">
-            <a:schemeClr val="dk1"/>
-          </a:lnRef>
-          <a:fillRef idx="0">
-            <a:schemeClr val="dk1"/>
-          </a:fillRef>
-          <a:effectRef idx="0">
-            <a:schemeClr val="dk1"/>
-          </a:effectRef>
-          <a:fontRef idx="minor">
-            <a:schemeClr val="tx1"/>
-          </a:fontRef>
-        </p:style>
-      </p:cxnSp>
-      <p:cxnSp>
-        <p:nvCxnSpPr>
-          <p:cNvPr id="18" name="Straight Connector 17">
-            <a:extLst>
-              <a:ext uri="{FF2B5EF4-FFF2-40B4-BE49-F238E27FC236}">
-                <a16:creationId xmlns:a16="http://schemas.microsoft.com/office/drawing/2014/main" id="{383E9D21-837C-EE4C-12F6-FB31C7E40601}"/>
-              </a:ext>
-            </a:extLst>
-          </p:cNvPr>
-          <p:cNvCxnSpPr/>
-          <p:nvPr/>
-        </p:nvCxnSpPr>
-        <p:spPr>
-          <a:xfrm>
-            <a:off x="7411229" y="1899920"/>
-            <a:ext cx="0" cy="3989705"/>
-          </a:xfrm>
-          <a:prstGeom prst="line">
-            <a:avLst/>
-          </a:prstGeom>
-        </p:spPr>
-        <p:style>
-          <a:lnRef idx="1">
-            <a:schemeClr val="dk1"/>
-          </a:lnRef>
-          <a:fillRef idx="0">
-            <a:schemeClr val="dk1"/>
-          </a:fillRef>
-          <a:effectRef idx="0">
-            <a:schemeClr val="dk1"/>
-          </a:effectRef>
-          <a:fontRef idx="minor">
-            <a:schemeClr val="tx1"/>
-          </a:fontRef>
-        </p:style>
-      </p:cxnSp>
-    </p:spTree>
-  </p:cSld>
-  <p:clrMapOvr>
-    <a:masterClrMapping/>
-  </p:clrMapOvr>
-</p:sld>
-</file>
-
-<file path=ppt/slides/slide4.xml><?xml version="1.0" encoding="utf-8"?>
-<p:sld xmlns:a="http://schemas.openxmlformats.org/drawingml/2006/main" xmlns:r="http://schemas.openxmlformats.org/officeDocument/2006/relationships" xmlns:p="http://schemas.openxmlformats.org/presentationml/2006/main">
-  <p:cSld name="Slide 4">
-    <p:spTree>
-      <p:nvGrpSpPr>
-        <p:cNvPr id="1" name=""/>
-        <p:cNvGrpSpPr/>
-        <p:nvPr/>
-      </p:nvGrpSpPr>
-      <p:grpSpPr>
-        <a:xfrm>
-          <a:off x="0" y="0"/>
-          <a:ext cx="0" cy="0"/>
-          <a:chOff x="0" y="0"/>
-          <a:chExt cx="0" cy="0"/>
-        </a:xfrm>
-      </p:grpSpPr>
-      <p:sp>
-        <p:nvSpPr>
-          <p:cNvPr id="2" name="Text 0"/>
-          <p:cNvSpPr/>
-          <p:nvPr/>
-        </p:nvSpPr>
-        <p:spPr>
-          <a:xfrm>
-            <a:off x="609585" y="609600"/>
-            <a:ext cx="11582110" cy="198041"/>
-          </a:xfrm>
-          <a:prstGeom prst="rect">
-            <a:avLst/>
-          </a:prstGeom>
-          <a:noFill/>
-          <a:ln/>
-        </p:spPr>
-        <p:txBody>
-          <a:bodyPr wrap="none" lIns="0" tIns="0" rIns="0" bIns="0" rtlCol="0" anchor="t"/>
-          <a:lstStyle/>
-          <a:p>
-            <a:pPr marL="0" indent="0" algn="l">
-              <a:lnSpc>
-                <a:spcPct val="108000"/>
-              </a:lnSpc>
-              <a:buNone/>
-            </a:pPr>
-            <a:r>
-              <a:rPr lang="en-US" sz="1200" kern="0" spc="48" dirty="0">
-                <a:solidFill>
-                  <a:srgbClr val="111111"/>
-                </a:solidFill>
-                <a:latin typeface="Red Hat Mono Medium" pitchFamily="34" charset="0"/>
-                <a:ea typeface="Red Hat Mono Medium" pitchFamily="34" charset="-122"/>
-                <a:cs typeface="Red Hat Mono Medium" pitchFamily="34" charset="-120"/>
-              </a:rPr>
-              <a:t>DATA QUALITY</a:t>
+              <a:t>SOURCE DOWNLOAD</a:t>
             </a:r>
             <a:endParaRPr lang="en-US" sz="1200" dirty="0"/>
           </a:p>
@@ -2582,7 +3228,7 @@
         </p:nvSpPr>
         <p:spPr>
           <a:xfrm>
-            <a:off x="609585" y="890191"/>
+            <a:off x="609585" y="1828210"/>
             <a:ext cx="10972526" cy="410170"/>
           </a:xfrm>
           <a:prstGeom prst="rect">
@@ -2610,7 +3256,7 @@
                 <a:ea typeface="Big Shoulders ExtraBold" pitchFamily="34" charset="-122"/>
                 <a:cs typeface="Big Shoulders ExtraBold" pitchFamily="34" charset="-120"/>
               </a:rPr>
-              <a:t>THE ANALYSIS KEEPS VERIFIED VALUES AND DROPS WEAK INPUTS</a:t>
+              <a:t>DATA QUALITY</a:t>
             </a:r>
             <a:endParaRPr lang="en-US" sz="3400" dirty="0"/>
           </a:p>
@@ -2624,8 +3270,8 @@
         </p:nvSpPr>
         <p:spPr>
           <a:xfrm>
-            <a:off x="4267093" y="1452761"/>
-            <a:ext cx="3657509" cy="4358779"/>
+            <a:off x="4187847" y="2360472"/>
+            <a:ext cx="3844045" cy="3187452"/>
           </a:xfrm>
           <a:custGeom>
             <a:avLst/>
@@ -2677,7 +3323,7 @@
         </p:nvSpPr>
         <p:spPr>
           <a:xfrm>
-            <a:off x="4546486" y="1706761"/>
+            <a:off x="4464108" y="2596451"/>
             <a:ext cx="659788" cy="316805"/>
           </a:xfrm>
           <a:prstGeom prst="roundRect">
@@ -2685,10 +3331,12 @@
               <a:gd name="adj" fmla="val 21551"/>
             </a:avLst>
           </a:prstGeom>
-          <a:solidFill>
-            <a:srgbClr val="E6E6E6"/>
-          </a:solidFill>
-          <a:ln/>
+          <a:noFill/>
+          <a:ln w="3175">
+            <a:solidFill>
+              <a:srgbClr val="C00000"/>
+            </a:solidFill>
+          </a:ln>
         </p:spPr>
         <p:txBody>
           <a:bodyPr/>
@@ -2706,8 +3354,8 @@
         </p:nvSpPr>
         <p:spPr>
           <a:xfrm>
-            <a:off x="4668323" y="1767681"/>
-            <a:ext cx="1025698" cy="194965"/>
+            <a:off x="4585945" y="2657371"/>
+            <a:ext cx="455612" cy="192385"/>
           </a:xfrm>
           <a:prstGeom prst="rect">
             <a:avLst/>
@@ -2728,7 +3376,7 @@
             <a:r>
               <a:rPr lang="en-US" sz="1300" kern="0" spc="51" dirty="0">
                 <a:solidFill>
-                  <a:srgbClr val="202020"/>
+                  <a:srgbClr val="C00000"/>
                 </a:solidFill>
                 <a:latin typeface="Red Hat Mono Medium" pitchFamily="34" charset="0"/>
                 <a:ea typeface="Red Hat Mono Medium" pitchFamily="34" charset="-122"/>
@@ -2736,7 +3384,11 @@
               </a:rPr>
               <a:t>KEEP</a:t>
             </a:r>
-            <a:endParaRPr lang="en-US" sz="1300" dirty="0"/>
+            <a:endParaRPr lang="en-US" sz="1300" dirty="0">
+              <a:solidFill>
+                <a:srgbClr val="C00000"/>
+              </a:solidFill>
+            </a:endParaRPr>
           </a:p>
         </p:txBody>
       </p:sp>
@@ -2748,7 +3400,7 @@
         </p:nvSpPr>
         <p:spPr>
           <a:xfrm>
-            <a:off x="4546486" y="2106116"/>
+            <a:off x="4464108" y="2995806"/>
             <a:ext cx="3098722" cy="639961"/>
           </a:xfrm>
           <a:prstGeom prst="rect">
@@ -2792,7 +3444,7 @@
         </p:nvSpPr>
         <p:spPr>
           <a:xfrm>
-            <a:off x="4546486" y="2892127"/>
+            <a:off x="4464108" y="3781817"/>
             <a:ext cx="3098722" cy="568920"/>
           </a:xfrm>
           <a:prstGeom prst="rect">
@@ -2830,40 +3482,13 @@
       </p:sp>
       <p:sp>
         <p:nvSpPr>
-          <p:cNvPr id="9" name="Shape 7"/>
-          <p:cNvSpPr/>
-          <p:nvPr/>
-        </p:nvSpPr>
-        <p:spPr>
-          <a:xfrm>
-            <a:off x="609584" y="1453912"/>
-            <a:ext cx="3657509" cy="4358779"/>
-          </a:xfrm>
-          <a:prstGeom prst="rect">
-            <a:avLst/>
-          </a:prstGeom>
-          <a:solidFill>
-            <a:srgbClr val="FAFAF8"/>
-          </a:solidFill>
-          <a:ln/>
-        </p:spPr>
-        <p:txBody>
-          <a:bodyPr/>
-          <a:lstStyle/>
-          <a:p>
-            <a:endParaRPr lang="en-US"/>
-          </a:p>
-        </p:txBody>
-      </p:sp>
-      <p:sp>
-        <p:nvSpPr>
           <p:cNvPr id="10" name="Shape 8"/>
           <p:cNvSpPr/>
           <p:nvPr/>
         </p:nvSpPr>
         <p:spPr>
           <a:xfrm>
-            <a:off x="888977" y="1707912"/>
+            <a:off x="806599" y="2597602"/>
             <a:ext cx="867845" cy="316805"/>
           </a:xfrm>
           <a:prstGeom prst="roundRect">
@@ -2874,7 +3499,10 @@
           <a:noFill/>
           <a:ln w="6350">
             <a:solidFill>
-              <a:srgbClr val="202020"/>
+              <a:schemeClr val="tx1">
+                <a:lumMod val="50000"/>
+                <a:lumOff val="50000"/>
+              </a:schemeClr>
             </a:solidFill>
             <a:prstDash val="solid"/>
           </a:ln>
@@ -2895,7 +3523,7 @@
         </p:nvSpPr>
         <p:spPr>
           <a:xfrm>
-            <a:off x="1010815" y="1768832"/>
+            <a:off x="928437" y="2658522"/>
             <a:ext cx="1233754" cy="194965"/>
           </a:xfrm>
           <a:prstGeom prst="rect">
@@ -2917,7 +3545,10 @@
             <a:r>
               <a:rPr lang="en-US" sz="1300" kern="0" spc="51" dirty="0">
                 <a:solidFill>
-                  <a:srgbClr val="202020"/>
+                  <a:schemeClr val="tx1">
+                    <a:lumMod val="50000"/>
+                    <a:lumOff val="50000"/>
+                  </a:schemeClr>
                 </a:solidFill>
                 <a:latin typeface="Red Hat Mono Medium" pitchFamily="34" charset="0"/>
                 <a:ea typeface="Red Hat Mono Medium" pitchFamily="34" charset="-122"/>
@@ -2925,7 +3556,14 @@
               </a:rPr>
               <a:t>IGNORE</a:t>
             </a:r>
-            <a:endParaRPr lang="en-US" sz="1300" dirty="0"/>
+            <a:endParaRPr lang="en-US" sz="1300" dirty="0">
+              <a:solidFill>
+                <a:schemeClr val="tx1">
+                  <a:lumMod val="50000"/>
+                  <a:lumOff val="50000"/>
+                </a:schemeClr>
+              </a:solidFill>
+            </a:endParaRPr>
           </a:p>
         </p:txBody>
       </p:sp>
@@ -2937,7 +3575,7 @@
         </p:nvSpPr>
         <p:spPr>
           <a:xfrm>
-            <a:off x="888977" y="2107267"/>
+            <a:off x="806599" y="2996957"/>
             <a:ext cx="3098722" cy="639961"/>
           </a:xfrm>
           <a:prstGeom prst="rect">
@@ -2981,7 +3619,7 @@
         </p:nvSpPr>
         <p:spPr>
           <a:xfrm>
-            <a:off x="888977" y="2893278"/>
+            <a:off x="806599" y="3782968"/>
             <a:ext cx="3098722" cy="568920"/>
           </a:xfrm>
           <a:prstGeom prst="rect">
@@ -3025,8 +3663,8 @@
         </p:nvSpPr>
         <p:spPr>
           <a:xfrm>
-            <a:off x="7924602" y="1452761"/>
-            <a:ext cx="3657509" cy="4358779"/>
+            <a:off x="7847672" y="2360472"/>
+            <a:ext cx="3657509" cy="3187452"/>
           </a:xfrm>
           <a:custGeom>
             <a:avLst/>
@@ -3078,7 +3716,7 @@
         </p:nvSpPr>
         <p:spPr>
           <a:xfrm>
-            <a:off x="8203995" y="1706761"/>
+            <a:off x="8121617" y="2596451"/>
             <a:ext cx="871424" cy="316805"/>
           </a:xfrm>
           <a:prstGeom prst="roundRect">
@@ -3086,10 +3724,12 @@
               <a:gd name="adj" fmla="val 21551"/>
             </a:avLst>
           </a:prstGeom>
-          <a:solidFill>
-            <a:srgbClr val="E6E6E6"/>
-          </a:solidFill>
-          <a:ln/>
+          <a:noFill/>
+          <a:ln w="12700">
+            <a:solidFill>
+              <a:srgbClr val="FFFF00"/>
+            </a:solidFill>
+          </a:ln>
         </p:spPr>
         <p:txBody>
           <a:bodyPr/>
@@ -3107,7 +3747,7 @@
         </p:nvSpPr>
         <p:spPr>
           <a:xfrm>
-            <a:off x="8325832" y="1767681"/>
+            <a:off x="8243454" y="2657371"/>
             <a:ext cx="1025698" cy="194965"/>
           </a:xfrm>
           <a:prstGeom prst="rect">
@@ -3129,7 +3769,7 @@
             <a:r>
               <a:rPr lang="en-US" sz="1300" kern="0" spc="51" dirty="0">
                 <a:solidFill>
-                  <a:srgbClr val="202020"/>
+                  <a:srgbClr val="FFFF00"/>
                 </a:solidFill>
                 <a:latin typeface="Red Hat Mono Medium" pitchFamily="34" charset="0"/>
                 <a:ea typeface="Red Hat Mono Medium" pitchFamily="34" charset="-122"/>
@@ -3137,7 +3777,11 @@
               </a:rPr>
               <a:t>RESULT</a:t>
             </a:r>
-            <a:endParaRPr lang="en-US" sz="1300" dirty="0"/>
+            <a:endParaRPr lang="en-US" sz="1300" dirty="0">
+              <a:solidFill>
+                <a:srgbClr val="FFFF00"/>
+              </a:solidFill>
+            </a:endParaRPr>
           </a:p>
         </p:txBody>
       </p:sp>
@@ -3149,7 +3793,7 @@
         </p:nvSpPr>
         <p:spPr>
           <a:xfrm>
-            <a:off x="8203995" y="2106116"/>
+            <a:off x="8121617" y="2995806"/>
             <a:ext cx="3098722" cy="319980"/>
           </a:xfrm>
           <a:prstGeom prst="rect">
@@ -3191,7 +3835,7 @@
         </p:nvSpPr>
         <p:spPr>
           <a:xfrm>
-            <a:off x="8203995" y="2572147"/>
+            <a:off x="8121617" y="3781817"/>
             <a:ext cx="3098722" cy="568920"/>
           </a:xfrm>
           <a:prstGeom prst="rect">
@@ -3221,63 +3865,343 @@
                 <a:ea typeface="Schibsted Grotesk" pitchFamily="34" charset="-122"/>
                 <a:cs typeface="Schibsted Grotesk" pitchFamily="34" charset="-120"/>
               </a:rPr>
-              <a:t>Two usable inputs remained after filtering.</a:t>
+              <a:t>Two usable data frame inputs remained after filtering.</a:t>
             </a:r>
             <a:endParaRPr lang="en-US" sz="1600" dirty="0"/>
           </a:p>
         </p:txBody>
       </p:sp>
-      <p:sp>
-        <p:nvSpPr>
-          <p:cNvPr id="20" name="Shape 18"/>
+      <p:cxnSp>
+        <p:nvCxnSpPr>
+          <p:cNvPr id="22" name="Straight Connector 21">
+            <a:extLst>
+              <a:ext uri="{FF2B5EF4-FFF2-40B4-BE49-F238E27FC236}">
+                <a16:creationId xmlns:a16="http://schemas.microsoft.com/office/drawing/2014/main" id="{CB8E18EC-A363-3590-0C67-64ED7F682061}"/>
+              </a:ext>
+            </a:extLst>
+          </p:cNvPr>
+          <p:cNvCxnSpPr>
+            <a:cxnSpLocks/>
+          </p:cNvCxnSpPr>
+          <p:nvPr/>
+        </p:nvCxnSpPr>
+        <p:spPr>
+          <a:xfrm flipH="1">
+            <a:off x="4179572" y="2360472"/>
+            <a:ext cx="6709" cy="3187454"/>
+          </a:xfrm>
+          <a:prstGeom prst="line">
+            <a:avLst/>
+          </a:prstGeom>
+        </p:spPr>
+        <p:style>
+          <a:lnRef idx="1">
+            <a:schemeClr val="dk1"/>
+          </a:lnRef>
+          <a:fillRef idx="0">
+            <a:schemeClr val="dk1"/>
+          </a:fillRef>
+          <a:effectRef idx="0">
+            <a:schemeClr val="dk1"/>
+          </a:effectRef>
+          <a:fontRef idx="minor">
+            <a:schemeClr val="tx1"/>
+          </a:fontRef>
+        </p:style>
+      </p:cxnSp>
+      <p:cxnSp>
+        <p:nvCxnSpPr>
+          <p:cNvPr id="23" name="Straight Connector 22">
+            <a:extLst>
+              <a:ext uri="{FF2B5EF4-FFF2-40B4-BE49-F238E27FC236}">
+                <a16:creationId xmlns:a16="http://schemas.microsoft.com/office/drawing/2014/main" id="{27158AA5-DD35-98ED-E020-9A632EC9D270}"/>
+              </a:ext>
+            </a:extLst>
+          </p:cNvPr>
+          <p:cNvCxnSpPr>
+            <a:cxnSpLocks/>
+          </p:cNvCxnSpPr>
+          <p:nvPr/>
+        </p:nvCxnSpPr>
+        <p:spPr>
+          <a:xfrm>
+            <a:off x="7845356" y="2360472"/>
+            <a:ext cx="0" cy="3187453"/>
+          </a:xfrm>
+          <a:prstGeom prst="line">
+            <a:avLst/>
+          </a:prstGeom>
+        </p:spPr>
+        <p:style>
+          <a:lnRef idx="1">
+            <a:schemeClr val="dk1"/>
+          </a:lnRef>
+          <a:fillRef idx="0">
+            <a:schemeClr val="dk1"/>
+          </a:fillRef>
+          <a:effectRef idx="0">
+            <a:schemeClr val="dk1"/>
+          </a:effectRef>
+          <a:fontRef idx="minor">
+            <a:schemeClr val="tx1"/>
+          </a:fontRef>
+        </p:style>
+      </p:cxnSp>
+      <p:sp>
+        <p:nvSpPr>
+          <p:cNvPr id="28" name="Rectangle 27">
+            <a:extLst>
+              <a:ext uri="{FF2B5EF4-FFF2-40B4-BE49-F238E27FC236}">
+                <a16:creationId xmlns:a16="http://schemas.microsoft.com/office/drawing/2014/main" id="{1678E8B5-58DD-A3AB-F744-D7E8E832F426}"/>
+              </a:ext>
+            </a:extLst>
+          </p:cNvPr>
           <p:cNvSpPr/>
           <p:nvPr/>
         </p:nvSpPr>
         <p:spPr>
           <a:xfrm>
-            <a:off x="4260743" y="1452761"/>
-            <a:ext cx="12700" cy="4358779"/>
+            <a:off x="0" y="6415469"/>
+            <a:ext cx="12192000" cy="442532"/>
           </a:xfrm>
           <a:prstGeom prst="rect">
             <a:avLst/>
           </a:prstGeom>
           <a:solidFill>
-            <a:srgbClr val="111111"/>
+            <a:schemeClr val="bg1"/>
           </a:solidFill>
-          <a:ln/>
-        </p:spPr>
-        <p:txBody>
-          <a:bodyPr/>
-          <a:lstStyle/>
-          <a:p>
+          <a:ln>
+            <a:solidFill>
+              <a:schemeClr val="bg1"/>
+            </a:solidFill>
+          </a:ln>
+        </p:spPr>
+        <p:style>
+          <a:lnRef idx="2">
+            <a:schemeClr val="accent1">
+              <a:shade val="15000"/>
+            </a:schemeClr>
+          </a:lnRef>
+          <a:fillRef idx="1">
+            <a:schemeClr val="accent1"/>
+          </a:fillRef>
+          <a:effectRef idx="0">
+            <a:schemeClr val="accent1"/>
+          </a:effectRef>
+          <a:fontRef idx="minor">
+            <a:schemeClr val="lt1"/>
+          </a:fontRef>
+        </p:style>
+        <p:txBody>
+          <a:bodyPr rtlCol="0" anchor="ctr"/>
+          <a:lstStyle/>
+          <a:p>
+            <a:pPr algn="ctr"/>
             <a:endParaRPr lang="en-US"/>
           </a:p>
         </p:txBody>
       </p:sp>
       <p:sp>
         <p:nvSpPr>
-          <p:cNvPr id="21" name="Shape 19"/>
-          <p:cNvSpPr/>
-          <p:nvPr/>
-        </p:nvSpPr>
-        <p:spPr>
-          <a:xfrm>
-            <a:off x="7918252" y="1452761"/>
-            <a:ext cx="12700" cy="4358779"/>
-          </a:xfrm>
-          <a:prstGeom prst="rect">
-            <a:avLst/>
-          </a:prstGeom>
-          <a:solidFill>
-            <a:srgbClr val="111111"/>
-          </a:solidFill>
-          <a:ln/>
-        </p:spPr>
-        <p:txBody>
-          <a:bodyPr/>
-          <a:lstStyle/>
-          <a:p>
-            <a:endParaRPr lang="en-US"/>
+          <p:cNvPr id="36" name="TextBox 35">
+            <a:extLst>
+              <a:ext uri="{FF2B5EF4-FFF2-40B4-BE49-F238E27FC236}">
+                <a16:creationId xmlns:a16="http://schemas.microsoft.com/office/drawing/2014/main" id="{DDC907A9-2897-5A50-4AE6-31FC841C91BB}"/>
+              </a:ext>
+            </a:extLst>
+          </p:cNvPr>
+          <p:cNvSpPr txBox="1"/>
+          <p:nvPr/>
+        </p:nvSpPr>
+        <p:spPr>
+          <a:xfrm>
+            <a:off x="0" y="6617362"/>
+            <a:ext cx="12192000" cy="236155"/>
+          </a:xfrm>
+          <a:prstGeom prst="rect">
+            <a:avLst/>
+          </a:prstGeom>
+          <a:noFill/>
+        </p:spPr>
+        <p:txBody>
+          <a:bodyPr wrap="square">
+            <a:spAutoFit/>
+          </a:bodyPr>
+          <a:lstStyle/>
+          <a:p>
+            <a:pPr algn="ctr">
+              <a:lnSpc>
+                <a:spcPct val="108000"/>
+              </a:lnSpc>
+            </a:pPr>
+            <a:r>
+              <a:rPr lang="en-US" sz="900" kern="0" spc="50" dirty="0">
+                <a:solidFill>
+                  <a:schemeClr val="bg2">
+                    <a:lumMod val="90000"/>
+                  </a:schemeClr>
+                </a:solidFill>
+                <a:latin typeface="Red Hat Mono Medium" pitchFamily="34" charset="0"/>
+                <a:ea typeface="Red Hat Mono Medium" pitchFamily="34" charset="-122"/>
+                <a:cs typeface="Red Hat Mono Medium" pitchFamily="34" charset="-120"/>
+              </a:rPr>
+              <a:t>EDA &amp; SQL PROJECT PRESENTATION by RIZKI FIRDAUS</a:t>
+            </a:r>
+            <a:endParaRPr lang="en-US" sz="900" dirty="0">
+              <a:solidFill>
+                <a:schemeClr val="bg2">
+                  <a:lumMod val="90000"/>
+                </a:schemeClr>
+              </a:solidFill>
+            </a:endParaRPr>
+          </a:p>
+        </p:txBody>
+      </p:sp>
+      <p:sp>
+        <p:nvSpPr>
+          <p:cNvPr id="37" name="TextBox 36">
+            <a:extLst>
+              <a:ext uri="{FF2B5EF4-FFF2-40B4-BE49-F238E27FC236}">
+                <a16:creationId xmlns:a16="http://schemas.microsoft.com/office/drawing/2014/main" id="{0B2B92BA-3E82-A1D0-D806-15FE92EC9F65}"/>
+              </a:ext>
+            </a:extLst>
+          </p:cNvPr>
+          <p:cNvSpPr txBox="1"/>
+          <p:nvPr/>
+        </p:nvSpPr>
+        <p:spPr>
+          <a:xfrm rot="16200000">
+            <a:off x="-3291204" y="3313584"/>
+            <a:ext cx="6858002" cy="230832"/>
+          </a:xfrm>
+          <a:prstGeom prst="rect">
+            <a:avLst/>
+          </a:prstGeom>
+          <a:noFill/>
+        </p:spPr>
+        <p:txBody>
+          <a:bodyPr wrap="square" rtlCol="0">
+            <a:spAutoFit/>
+          </a:bodyPr>
+          <a:lstStyle/>
+          <a:p>
+            <a:pPr algn="ctr"/>
+            <a:r>
+              <a:rPr lang="en-US" sz="900" kern="0" spc="50" dirty="0">
+                <a:solidFill>
+                  <a:schemeClr val="bg2">
+                    <a:lumMod val="90000"/>
+                  </a:schemeClr>
+                </a:solidFill>
+                <a:latin typeface="Red Hat Mono Medium" pitchFamily="34" charset="0"/>
+                <a:ea typeface="Red Hat Mono Medium" pitchFamily="34" charset="-122"/>
+                <a:cs typeface="Red Hat Mono Medium" pitchFamily="34" charset="-120"/>
+              </a:rPr>
+              <a:t>IRONHACK | WEEK 3 | PROJECT 1</a:t>
+            </a:r>
+            <a:endParaRPr lang="en-US" sz="900" dirty="0"/>
+          </a:p>
+        </p:txBody>
+      </p:sp>
+      <p:sp>
+        <p:nvSpPr>
+          <p:cNvPr id="38" name="TextBox 37">
+            <a:extLst>
+              <a:ext uri="{FF2B5EF4-FFF2-40B4-BE49-F238E27FC236}">
+                <a16:creationId xmlns:a16="http://schemas.microsoft.com/office/drawing/2014/main" id="{44CB2259-3388-FE48-70E4-980D83E73A06}"/>
+              </a:ext>
+            </a:extLst>
+          </p:cNvPr>
+          <p:cNvSpPr txBox="1"/>
+          <p:nvPr/>
+        </p:nvSpPr>
+        <p:spPr>
+          <a:xfrm>
+            <a:off x="0" y="20750"/>
+            <a:ext cx="12192000" cy="236155"/>
+          </a:xfrm>
+          <a:prstGeom prst="rect">
+            <a:avLst/>
+          </a:prstGeom>
+          <a:noFill/>
+        </p:spPr>
+        <p:txBody>
+          <a:bodyPr wrap="square">
+            <a:spAutoFit/>
+          </a:bodyPr>
+          <a:lstStyle/>
+          <a:p>
+            <a:pPr algn="ctr">
+              <a:lnSpc>
+                <a:spcPct val="108000"/>
+              </a:lnSpc>
+            </a:pPr>
+            <a:r>
+              <a:rPr lang="en-US" sz="900" kern="0" spc="50" dirty="0">
+                <a:solidFill>
+                  <a:schemeClr val="bg2">
+                    <a:lumMod val="90000"/>
+                  </a:schemeClr>
+                </a:solidFill>
+                <a:latin typeface="Red Hat Mono Medium" pitchFamily="34" charset="0"/>
+                <a:ea typeface="Red Hat Mono Medium" pitchFamily="34" charset="-122"/>
+                <a:cs typeface="Red Hat Mono Medium" pitchFamily="34" charset="-120"/>
+              </a:rPr>
+              <a:t>- COFFEE LAND VS PRICE -</a:t>
+            </a:r>
+            <a:endParaRPr lang="en-US" sz="900" dirty="0">
+              <a:solidFill>
+                <a:schemeClr val="bg2">
+                  <a:lumMod val="90000"/>
+                </a:schemeClr>
+              </a:solidFill>
+            </a:endParaRPr>
+          </a:p>
+        </p:txBody>
+      </p:sp>
+      <p:sp>
+        <p:nvSpPr>
+          <p:cNvPr id="40" name="TextBox 39">
+            <a:extLst>
+              <a:ext uri="{FF2B5EF4-FFF2-40B4-BE49-F238E27FC236}">
+                <a16:creationId xmlns:a16="http://schemas.microsoft.com/office/drawing/2014/main" id="{D46948CC-0DE7-9EB5-9DA2-69CE67650566}"/>
+              </a:ext>
+            </a:extLst>
+          </p:cNvPr>
+          <p:cNvSpPr txBox="1"/>
+          <p:nvPr/>
+        </p:nvSpPr>
+        <p:spPr>
+          <a:xfrm rot="5400000">
+            <a:off x="8626826" y="3313584"/>
+            <a:ext cx="6858002" cy="230832"/>
+          </a:xfrm>
+          <a:prstGeom prst="rect">
+            <a:avLst/>
+          </a:prstGeom>
+          <a:noFill/>
+        </p:spPr>
+        <p:txBody>
+          <a:bodyPr wrap="square" rtlCol="0">
+            <a:spAutoFit/>
+          </a:bodyPr>
+          <a:lstStyle/>
+          <a:p>
+            <a:pPr algn="ctr"/>
+            <a:r>
+              <a:rPr lang="en-US" sz="900" kern="0" spc="50" dirty="0">
+                <a:solidFill>
+                  <a:schemeClr val="bg2">
+                    <a:lumMod val="90000"/>
+                  </a:schemeClr>
+                </a:solidFill>
+                <a:latin typeface="Red Hat Mono Medium" pitchFamily="34" charset="0"/>
+                <a:ea typeface="Red Hat Mono Medium" pitchFamily="34" charset="-122"/>
+                <a:cs typeface="Red Hat Mono Medium" pitchFamily="34" charset="-120"/>
+              </a:rPr>
+              <a:t>2 OCTOBER 2026</a:t>
+            </a:r>
+            <a:endParaRPr lang="en-US" sz="900" dirty="0"/>
           </a:p>
         </p:txBody>
       </p:sp>
@@ -3314,8 +4238,8 @@
         </p:nvSpPr>
         <p:spPr>
           <a:xfrm>
-            <a:off x="5892653" y="0"/>
-            <a:ext cx="6299042" cy="6858000"/>
+            <a:off x="-305" y="0"/>
+            <a:ext cx="12192000" cy="6858000"/>
           </a:xfrm>
           <a:prstGeom prst="rect">
             <a:avLst/>
@@ -3335,41 +4259,14 @@
       </p:sp>
       <p:sp>
         <p:nvSpPr>
-          <p:cNvPr id="2" name="Shape 0"/>
-          <p:cNvSpPr/>
-          <p:nvPr/>
-        </p:nvSpPr>
-        <p:spPr>
-          <a:xfrm>
-            <a:off x="31902" y="0"/>
-            <a:ext cx="5892653" cy="6858000"/>
-          </a:xfrm>
-          <a:prstGeom prst="rect">
-            <a:avLst/>
-          </a:prstGeom>
-          <a:solidFill>
-            <a:srgbClr val="FAFAF8"/>
-          </a:solidFill>
-          <a:ln/>
-        </p:spPr>
-        <p:txBody>
-          <a:bodyPr/>
-          <a:lstStyle/>
-          <a:p>
-            <a:endParaRPr lang="en-US"/>
-          </a:p>
-        </p:txBody>
-      </p:sp>
-      <p:sp>
-        <p:nvSpPr>
           <p:cNvPr id="3" name="Text 1"/>
           <p:cNvSpPr/>
           <p:nvPr/>
         </p:nvSpPr>
         <p:spPr>
           <a:xfrm>
-            <a:off x="914377" y="2080418"/>
-            <a:ext cx="5587860" cy="198041"/>
+            <a:off x="914377" y="1668520"/>
+            <a:ext cx="4909774" cy="198041"/>
           </a:xfrm>
           <a:prstGeom prst="rect">
             <a:avLst/>
@@ -3410,8 +4307,8 @@
         </p:nvSpPr>
         <p:spPr>
           <a:xfrm>
-            <a:off x="914377" y="2361009"/>
-            <a:ext cx="5283068" cy="820341"/>
+            <a:off x="914377" y="1949111"/>
+            <a:ext cx="5181623" cy="820341"/>
           </a:xfrm>
           <a:prstGeom prst="rect">
             <a:avLst/>
@@ -3454,7 +4351,7 @@
         </p:nvSpPr>
         <p:spPr>
           <a:xfrm>
-            <a:off x="914377" y="3047603"/>
+            <a:off x="914607" y="2643502"/>
             <a:ext cx="5283068" cy="2075061"/>
           </a:xfrm>
           <a:prstGeom prst="rect">
@@ -3545,15 +4442,27 @@
           <p:nvPr/>
         </p:nvPicPr>
         <p:blipFill>
-          <a:blip r:embed="rId3"/>
+          <a:blip r:embed="rId3">
+            <a:clrChange>
+              <a:clrFrom>
+                <a:srgbClr val="FFFFFF"/>
+              </a:clrFrom>
+              <a:clrTo>
+                <a:srgbClr val="FFFFFF">
+                  <a:alpha val="0"/>
+                </a:srgbClr>
+              </a:clrTo>
+            </a:clrChange>
+          </a:blip>
+          <a:srcRect b="14005"/>
           <a:stretch>
             <a:fillRect/>
           </a:stretch>
         </p:blipFill>
         <p:spPr>
           <a:xfrm>
-            <a:off x="6299349" y="1322586"/>
-            <a:ext cx="4940176" cy="3717528"/>
+            <a:off x="6545325" y="2043702"/>
+            <a:ext cx="4940176" cy="3196863"/>
           </a:xfrm>
           <a:prstGeom prst="rect">
             <a:avLst/>
@@ -3568,7 +4477,7 @@
         </p:nvSpPr>
         <p:spPr>
           <a:xfrm>
-            <a:off x="6197445" y="5122664"/>
+            <a:off x="6197445" y="5187708"/>
             <a:ext cx="5689458" cy="412750"/>
           </a:xfrm>
           <a:prstGeom prst="rect">
@@ -3583,24 +4492,302 @@
           </a:bodyPr>
           <a:lstStyle/>
           <a:p>
-            <a:pPr marL="0" indent="0" algn="l">
+            <a:pPr marL="0" indent="0" algn="ctr">
               <a:lnSpc>
                 <a:spcPct val="108000"/>
               </a:lnSpc>
               <a:buNone/>
             </a:pPr>
             <a:r>
-              <a:rPr lang="en-US" sz="1250" kern="0" spc="50" dirty="0">
-                <a:solidFill>
-                  <a:srgbClr val="202020"/>
+              <a:rPr lang="en-US" sz="1000" kern="0" spc="50" dirty="0">
+                <a:solidFill>
+                  <a:schemeClr val="bg1">
+                    <a:lumMod val="65000"/>
+                  </a:schemeClr>
                 </a:solidFill>
                 <a:latin typeface="Red Hat Mono Medium" pitchFamily="34" charset="0"/>
                 <a:ea typeface="Red Hat Mono Medium" pitchFamily="34" charset="-122"/>
                 <a:cs typeface="Red Hat Mono Medium" pitchFamily="34" charset="-120"/>
               </a:rPr>
-              <a:t>ENTITY RELATIONAL DIAGRAM (ERD) · SOURCE: SUPPLIED POWERPOINT CONTENT</a:t>
-            </a:r>
-            <a:endParaRPr lang="en-US" sz="1250" dirty="0"/>
+              <a:t>ENTITY RELATIONAL DIAGRAM (ERD)</a:t>
+            </a:r>
+          </a:p>
+          <a:p>
+            <a:pPr marL="0" indent="0" algn="ctr">
+              <a:lnSpc>
+                <a:spcPct val="108000"/>
+              </a:lnSpc>
+              <a:buNone/>
+            </a:pPr>
+            <a:r>
+              <a:rPr lang="en-US" sz="1000" kern="0" spc="50" dirty="0">
+                <a:solidFill>
+                  <a:schemeClr val="bg1">
+                    <a:lumMod val="65000"/>
+                  </a:schemeClr>
+                </a:solidFill>
+                <a:latin typeface="Red Hat Mono Medium" pitchFamily="34" charset="0"/>
+                <a:ea typeface="Red Hat Mono Medium" pitchFamily="34" charset="-122"/>
+                <a:cs typeface="Red Hat Mono Medium" pitchFamily="34" charset="-120"/>
+              </a:rPr>
+              <a:t>SOURCE: SUPPLIED POWERPOINT CONTENT</a:t>
+            </a:r>
+            <a:endParaRPr lang="en-US" sz="1000" dirty="0">
+              <a:solidFill>
+                <a:schemeClr val="bg1">
+                  <a:lumMod val="65000"/>
+                </a:schemeClr>
+              </a:solidFill>
+            </a:endParaRPr>
+          </a:p>
+        </p:txBody>
+      </p:sp>
+      <p:cxnSp>
+        <p:nvCxnSpPr>
+          <p:cNvPr id="9" name="Straight Connector 8">
+            <a:extLst>
+              <a:ext uri="{FF2B5EF4-FFF2-40B4-BE49-F238E27FC236}">
+                <a16:creationId xmlns:a16="http://schemas.microsoft.com/office/drawing/2014/main" id="{F5C8A529-9827-DF22-2D59-153FFDF62814}"/>
+              </a:ext>
+            </a:extLst>
+          </p:cNvPr>
+          <p:cNvCxnSpPr>
+            <a:cxnSpLocks/>
+          </p:cNvCxnSpPr>
+          <p:nvPr/>
+        </p:nvCxnSpPr>
+        <p:spPr>
+          <a:xfrm>
+            <a:off x="6304934" y="1186249"/>
+            <a:ext cx="0" cy="4522144"/>
+          </a:xfrm>
+          <a:prstGeom prst="line">
+            <a:avLst/>
+          </a:prstGeom>
+          <a:ln>
+            <a:solidFill>
+              <a:schemeClr val="bg1">
+                <a:lumMod val="75000"/>
+              </a:schemeClr>
+            </a:solidFill>
+          </a:ln>
+        </p:spPr>
+        <p:style>
+          <a:lnRef idx="1">
+            <a:schemeClr val="dk1"/>
+          </a:lnRef>
+          <a:fillRef idx="0">
+            <a:schemeClr val="dk1"/>
+          </a:fillRef>
+          <a:effectRef idx="0">
+            <a:schemeClr val="dk1"/>
+          </a:effectRef>
+          <a:fontRef idx="minor">
+            <a:schemeClr val="tx1"/>
+          </a:fontRef>
+        </p:style>
+      </p:cxnSp>
+      <p:sp>
+        <p:nvSpPr>
+          <p:cNvPr id="11" name="TextBox 10">
+            <a:extLst>
+              <a:ext uri="{FF2B5EF4-FFF2-40B4-BE49-F238E27FC236}">
+                <a16:creationId xmlns:a16="http://schemas.microsoft.com/office/drawing/2014/main" id="{35698675-C8B8-8EDE-744B-DA26337C2A73}"/>
+              </a:ext>
+            </a:extLst>
+          </p:cNvPr>
+          <p:cNvSpPr txBox="1"/>
+          <p:nvPr/>
+        </p:nvSpPr>
+        <p:spPr>
+          <a:xfrm>
+            <a:off x="0" y="6617362"/>
+            <a:ext cx="12192000" cy="236155"/>
+          </a:xfrm>
+          <a:prstGeom prst="rect">
+            <a:avLst/>
+          </a:prstGeom>
+          <a:noFill/>
+        </p:spPr>
+        <p:txBody>
+          <a:bodyPr wrap="square">
+            <a:spAutoFit/>
+          </a:bodyPr>
+          <a:lstStyle/>
+          <a:p>
+            <a:pPr algn="ctr">
+              <a:lnSpc>
+                <a:spcPct val="108000"/>
+              </a:lnSpc>
+            </a:pPr>
+            <a:r>
+              <a:rPr lang="en-US" sz="900" kern="0" spc="50" dirty="0">
+                <a:solidFill>
+                  <a:schemeClr val="bg2">
+                    <a:lumMod val="90000"/>
+                  </a:schemeClr>
+                </a:solidFill>
+                <a:latin typeface="Red Hat Mono Medium" pitchFamily="34" charset="0"/>
+                <a:ea typeface="Red Hat Mono Medium" pitchFamily="34" charset="-122"/>
+                <a:cs typeface="Red Hat Mono Medium" pitchFamily="34" charset="-120"/>
+              </a:rPr>
+              <a:t>EDA &amp; SQL PROJECT PRESENTATION by RIZKI FIRDAUS</a:t>
+            </a:r>
+            <a:endParaRPr lang="en-US" sz="900" dirty="0">
+              <a:solidFill>
+                <a:schemeClr val="bg2">
+                  <a:lumMod val="90000"/>
+                </a:schemeClr>
+              </a:solidFill>
+            </a:endParaRPr>
+          </a:p>
+        </p:txBody>
+      </p:sp>
+      <p:sp>
+        <p:nvSpPr>
+          <p:cNvPr id="12" name="TextBox 11">
+            <a:extLst>
+              <a:ext uri="{FF2B5EF4-FFF2-40B4-BE49-F238E27FC236}">
+                <a16:creationId xmlns:a16="http://schemas.microsoft.com/office/drawing/2014/main" id="{3A2BC999-591A-6D26-CE1B-A0ABC2F95562}"/>
+              </a:ext>
+            </a:extLst>
+          </p:cNvPr>
+          <p:cNvSpPr txBox="1"/>
+          <p:nvPr/>
+        </p:nvSpPr>
+        <p:spPr>
+          <a:xfrm rot="16200000">
+            <a:off x="-3291204" y="3313584"/>
+            <a:ext cx="6858002" cy="230832"/>
+          </a:xfrm>
+          <a:prstGeom prst="rect">
+            <a:avLst/>
+          </a:prstGeom>
+          <a:noFill/>
+        </p:spPr>
+        <p:txBody>
+          <a:bodyPr wrap="square" rtlCol="0">
+            <a:spAutoFit/>
+          </a:bodyPr>
+          <a:lstStyle/>
+          <a:p>
+            <a:pPr algn="ctr"/>
+            <a:r>
+              <a:rPr lang="en-US" sz="900" kern="0" spc="50" dirty="0">
+                <a:solidFill>
+                  <a:schemeClr val="bg2">
+                    <a:lumMod val="90000"/>
+                  </a:schemeClr>
+                </a:solidFill>
+                <a:latin typeface="Red Hat Mono Medium" pitchFamily="34" charset="0"/>
+                <a:ea typeface="Red Hat Mono Medium" pitchFamily="34" charset="-122"/>
+                <a:cs typeface="Red Hat Mono Medium" pitchFamily="34" charset="-120"/>
+              </a:rPr>
+              <a:t>IRONHACK | WEEK 3 | PROJECT 1</a:t>
+            </a:r>
+            <a:endParaRPr lang="en-US" sz="900" dirty="0"/>
+          </a:p>
+        </p:txBody>
+      </p:sp>
+      <p:sp>
+        <p:nvSpPr>
+          <p:cNvPr id="13" name="TextBox 12">
+            <a:extLst>
+              <a:ext uri="{FF2B5EF4-FFF2-40B4-BE49-F238E27FC236}">
+                <a16:creationId xmlns:a16="http://schemas.microsoft.com/office/drawing/2014/main" id="{D08C1B26-3CF0-AB6E-EC14-0E5563024245}"/>
+              </a:ext>
+            </a:extLst>
+          </p:cNvPr>
+          <p:cNvSpPr txBox="1"/>
+          <p:nvPr/>
+        </p:nvSpPr>
+        <p:spPr>
+          <a:xfrm>
+            <a:off x="0" y="20750"/>
+            <a:ext cx="12192000" cy="236155"/>
+          </a:xfrm>
+          <a:prstGeom prst="rect">
+            <a:avLst/>
+          </a:prstGeom>
+          <a:noFill/>
+        </p:spPr>
+        <p:txBody>
+          <a:bodyPr wrap="square">
+            <a:spAutoFit/>
+          </a:bodyPr>
+          <a:lstStyle/>
+          <a:p>
+            <a:pPr algn="ctr">
+              <a:lnSpc>
+                <a:spcPct val="108000"/>
+              </a:lnSpc>
+            </a:pPr>
+            <a:r>
+              <a:rPr lang="en-US" sz="900" kern="0" spc="50" dirty="0">
+                <a:solidFill>
+                  <a:schemeClr val="bg2">
+                    <a:lumMod val="90000"/>
+                  </a:schemeClr>
+                </a:solidFill>
+                <a:latin typeface="Red Hat Mono Medium" pitchFamily="34" charset="0"/>
+                <a:ea typeface="Red Hat Mono Medium" pitchFamily="34" charset="-122"/>
+                <a:cs typeface="Red Hat Mono Medium" pitchFamily="34" charset="-120"/>
+              </a:rPr>
+              <a:t>- COFFEE LAND VS PRICE -</a:t>
+            </a:r>
+            <a:endParaRPr lang="en-US" sz="900" dirty="0">
+              <a:solidFill>
+                <a:schemeClr val="bg2">
+                  <a:lumMod val="90000"/>
+                </a:schemeClr>
+              </a:solidFill>
+            </a:endParaRPr>
+          </a:p>
+        </p:txBody>
+      </p:sp>
+      <p:sp>
+        <p:nvSpPr>
+          <p:cNvPr id="15" name="TextBox 14">
+            <a:extLst>
+              <a:ext uri="{FF2B5EF4-FFF2-40B4-BE49-F238E27FC236}">
+                <a16:creationId xmlns:a16="http://schemas.microsoft.com/office/drawing/2014/main" id="{B9F80828-03B3-8D2B-75C8-EBF3EB06A9CA}"/>
+              </a:ext>
+            </a:extLst>
+          </p:cNvPr>
+          <p:cNvSpPr txBox="1"/>
+          <p:nvPr/>
+        </p:nvSpPr>
+        <p:spPr>
+          <a:xfrm rot="5400000">
+            <a:off x="8626826" y="3313584"/>
+            <a:ext cx="6858002" cy="230832"/>
+          </a:xfrm>
+          <a:prstGeom prst="rect">
+            <a:avLst/>
+          </a:prstGeom>
+          <a:noFill/>
+        </p:spPr>
+        <p:txBody>
+          <a:bodyPr wrap="square" rtlCol="0">
+            <a:spAutoFit/>
+          </a:bodyPr>
+          <a:lstStyle/>
+          <a:p>
+            <a:pPr algn="ctr"/>
+            <a:r>
+              <a:rPr lang="en-US" sz="900" kern="0" spc="50" dirty="0">
+                <a:solidFill>
+                  <a:schemeClr val="bg2">
+                    <a:lumMod val="90000"/>
+                  </a:schemeClr>
+                </a:solidFill>
+                <a:latin typeface="Red Hat Mono Medium" pitchFamily="34" charset="0"/>
+                <a:ea typeface="Red Hat Mono Medium" pitchFamily="34" charset="-122"/>
+                <a:cs typeface="Red Hat Mono Medium" pitchFamily="34" charset="-120"/>
+              </a:rPr>
+              <a:t>2 OCTOBER 2026</a:t>
+            </a:r>
+            <a:endParaRPr lang="en-US" sz="900" dirty="0"/>
           </a:p>
         </p:txBody>
       </p:sp>
@@ -3631,37 +4818,10 @@
       </p:grpSpPr>
       <p:sp>
         <p:nvSpPr>
-          <p:cNvPr id="5" name="Shape 3"/>
-          <p:cNvSpPr/>
-          <p:nvPr/>
-        </p:nvSpPr>
-        <p:spPr>
-          <a:xfrm>
-            <a:off x="305" y="1268204"/>
-            <a:ext cx="12191695" cy="5589796"/>
-          </a:xfrm>
-          <a:prstGeom prst="rect">
-            <a:avLst/>
-          </a:prstGeom>
-          <a:solidFill>
-            <a:srgbClr val="F1F2F4"/>
-          </a:solidFill>
-          <a:ln/>
-        </p:spPr>
-        <p:txBody>
-          <a:bodyPr/>
-          <a:lstStyle/>
-          <a:p>
-            <a:endParaRPr lang="en-US"/>
-          </a:p>
-        </p:txBody>
-      </p:sp>
-      <p:sp>
-        <p:nvSpPr>
-          <p:cNvPr id="16" name="Shape 4">
+          <p:cNvPr id="23" name="Shape 0">
             <a:extLst>
               <a:ext uri="{FF2B5EF4-FFF2-40B4-BE49-F238E27FC236}">
-                <a16:creationId xmlns:a16="http://schemas.microsoft.com/office/drawing/2014/main" id="{2AC2FC1A-7CCE-825C-C0DB-D16E39F9BCA6}"/>
+                <a16:creationId xmlns:a16="http://schemas.microsoft.com/office/drawing/2014/main" id="{89242359-B6A8-ACC5-6BEE-980A791F727E}"/>
               </a:ext>
             </a:extLst>
           </p:cNvPr>
@@ -3670,14 +4830,14 @@
         </p:nvSpPr>
         <p:spPr>
           <a:xfrm>
-            <a:off x="5477483" y="3893929"/>
-            <a:ext cx="4409441" cy="2473325"/>
+            <a:off x="0" y="-8092"/>
+            <a:ext cx="12192000" cy="6858000"/>
           </a:xfrm>
           <a:prstGeom prst="rect">
             <a:avLst/>
           </a:prstGeom>
           <a:solidFill>
-            <a:srgbClr val="FFFFFF"/>
+            <a:srgbClr val="FAFAF8"/>
           </a:solidFill>
           <a:ln/>
         </p:spPr>
@@ -3691,80 +4851,14 @@
       </p:sp>
       <p:sp>
         <p:nvSpPr>
-          <p:cNvPr id="15" name="Shape 4">
-            <a:extLst>
-              <a:ext uri="{FF2B5EF4-FFF2-40B4-BE49-F238E27FC236}">
-                <a16:creationId xmlns:a16="http://schemas.microsoft.com/office/drawing/2014/main" id="{F57DD313-FE3E-7584-F448-7094ED7CCB80}"/>
-              </a:ext>
-            </a:extLst>
-          </p:cNvPr>
-          <p:cNvSpPr/>
-          <p:nvPr/>
-        </p:nvSpPr>
-        <p:spPr>
-          <a:xfrm>
-            <a:off x="5477483" y="1338461"/>
-            <a:ext cx="4409441" cy="2473325"/>
-          </a:xfrm>
-          <a:prstGeom prst="rect">
-            <a:avLst/>
-          </a:prstGeom>
-          <a:solidFill>
-            <a:srgbClr val="FFFFFF"/>
-          </a:solidFill>
-          <a:ln/>
-        </p:spPr>
-        <p:txBody>
-          <a:bodyPr/>
-          <a:lstStyle/>
-          <a:p>
-            <a:endParaRPr lang="en-US"/>
-          </a:p>
-        </p:txBody>
-      </p:sp>
-      <p:sp>
-        <p:nvSpPr>
-          <p:cNvPr id="14" name="Shape 4">
-            <a:extLst>
-              <a:ext uri="{FF2B5EF4-FFF2-40B4-BE49-F238E27FC236}">
-                <a16:creationId xmlns:a16="http://schemas.microsoft.com/office/drawing/2014/main" id="{3FFDAE05-6ED5-F2D3-9276-AFFB08F6DCFA}"/>
-              </a:ext>
-            </a:extLst>
-          </p:cNvPr>
-          <p:cNvSpPr/>
-          <p:nvPr/>
-        </p:nvSpPr>
-        <p:spPr>
-          <a:xfrm>
-            <a:off x="741679" y="3893930"/>
-            <a:ext cx="4409441" cy="2473325"/>
-          </a:xfrm>
-          <a:prstGeom prst="rect">
-            <a:avLst/>
-          </a:prstGeom>
-          <a:solidFill>
-            <a:srgbClr val="FFFFFF"/>
-          </a:solidFill>
-          <a:ln/>
-        </p:spPr>
-        <p:txBody>
-          <a:bodyPr/>
-          <a:lstStyle/>
-          <a:p>
-            <a:endParaRPr lang="en-US"/>
-          </a:p>
-        </p:txBody>
-      </p:sp>
-      <p:sp>
-        <p:nvSpPr>
           <p:cNvPr id="3" name="Text 1"/>
           <p:cNvSpPr/>
           <p:nvPr/>
         </p:nvSpPr>
         <p:spPr>
           <a:xfrm>
-            <a:off x="751839" y="355600"/>
-            <a:ext cx="11734506" cy="530820"/>
+            <a:off x="0" y="464344"/>
+            <a:ext cx="12191999" cy="530820"/>
           </a:xfrm>
           <a:prstGeom prst="rect">
             <a:avLst/>
@@ -3776,7 +4870,7 @@
           <a:bodyPr wrap="none" lIns="0" tIns="0" rIns="0" bIns="0" rtlCol="0" anchor="t"/>
           <a:lstStyle/>
           <a:p>
-            <a:pPr marL="0" indent="0" algn="l">
+            <a:pPr marL="0" indent="0" algn="ctr">
               <a:lnSpc>
                 <a:spcPct val="79000"/>
               </a:lnSpc>
@@ -3791,78 +4885,9 @@
                 <a:ea typeface="Big Shoulders ExtraBold" pitchFamily="34" charset="-122"/>
                 <a:cs typeface="Big Shoulders ExtraBold" pitchFamily="34" charset="-120"/>
               </a:rPr>
-              <a:t>FINDINGS FROM THE DATA</a:t>
+              <a:t>FINDINGS</a:t>
             </a:r>
             <a:endParaRPr lang="en-US" sz="4400" dirty="0"/>
-          </a:p>
-        </p:txBody>
-      </p:sp>
-      <p:sp>
-        <p:nvSpPr>
-          <p:cNvPr id="4" name="Text 2"/>
-          <p:cNvSpPr/>
-          <p:nvPr/>
-        </p:nvSpPr>
-        <p:spPr>
-          <a:xfrm>
-            <a:off x="741679" y="885021"/>
-            <a:ext cx="11963101" cy="248841"/>
-          </a:xfrm>
-          <a:prstGeom prst="rect">
-            <a:avLst/>
-          </a:prstGeom>
-          <a:noFill/>
-          <a:ln/>
-        </p:spPr>
-        <p:txBody>
-          <a:bodyPr wrap="none" lIns="0" tIns="0" rIns="0" bIns="0" rtlCol="0" anchor="t"/>
-          <a:lstStyle/>
-          <a:p>
-            <a:pPr marL="0" indent="0" algn="l">
-              <a:lnSpc>
-                <a:spcPct val="117000"/>
-              </a:lnSpc>
-              <a:buNone/>
-            </a:pPr>
-            <a:r>
-              <a:rPr lang="en-US" sz="1400" dirty="0">
-                <a:solidFill>
-                  <a:srgbClr val="000000"/>
-                </a:solidFill>
-                <a:latin typeface="Schibsted Grotesk" pitchFamily="34" charset="0"/>
-                <a:ea typeface="Schibsted Grotesk" pitchFamily="34" charset="-122"/>
-                <a:cs typeface="Schibsted Grotesk" pitchFamily="34" charset="-120"/>
-              </a:rPr>
-              <a:t>Brazil leads production and exports; the yield–price relationship is mixed rather than a simple straight line.</a:t>
-            </a:r>
-            <a:endParaRPr lang="en-US" sz="1400" dirty="0"/>
-          </a:p>
-        </p:txBody>
-      </p:sp>
-      <p:sp>
-        <p:nvSpPr>
-          <p:cNvPr id="6" name="Shape 4"/>
-          <p:cNvSpPr/>
-          <p:nvPr/>
-        </p:nvSpPr>
-        <p:spPr>
-          <a:xfrm>
-            <a:off x="751839" y="1343770"/>
-            <a:ext cx="4409441" cy="2473325"/>
-          </a:xfrm>
-          <a:prstGeom prst="rect">
-            <a:avLst/>
-          </a:prstGeom>
-          <a:solidFill>
-            <a:srgbClr val="FFFFFF"/>
-          </a:solidFill>
-          <a:ln/>
-        </p:spPr>
-        <p:txBody>
-          <a:bodyPr/>
-          <a:lstStyle/>
-          <a:p>
-            <a:endParaRPr lang="en-US"/>
           </a:p>
         </p:txBody>
       </p:sp>
@@ -3875,15 +4900,27 @@
           <p:nvPr/>
         </p:nvPicPr>
         <p:blipFill>
-          <a:blip r:embed="rId3"/>
+          <a:blip r:embed="rId3">
+            <a:clrChange>
+              <a:clrFrom>
+                <a:srgbClr val="FFFFFF"/>
+              </a:clrFrom>
+              <a:clrTo>
+                <a:srgbClr val="FFFFFF">
+                  <a:alpha val="0"/>
+                </a:srgbClr>
+              </a:clrTo>
+            </a:clrChange>
+          </a:blip>
+          <a:srcRect l="3178" t="5487"/>
           <a:stretch>
             <a:fillRect/>
           </a:stretch>
         </p:blipFill>
         <p:spPr>
           <a:xfrm>
-            <a:off x="1111487" y="3988484"/>
-            <a:ext cx="3390815" cy="2140942"/>
+            <a:off x="65925" y="1355813"/>
+            <a:ext cx="3734401" cy="2301641"/>
           </a:xfrm>
           <a:prstGeom prst="rect">
             <a:avLst/>
@@ -3899,15 +4936,27 @@
           <p:nvPr/>
         </p:nvPicPr>
         <p:blipFill>
-          <a:blip r:embed="rId4"/>
+          <a:blip r:embed="rId4">
+            <a:clrChange>
+              <a:clrFrom>
+                <a:srgbClr val="FFFFFF"/>
+              </a:clrFrom>
+              <a:clrTo>
+                <a:srgbClr val="FFFFFF">
+                  <a:alpha val="0"/>
+                </a:srgbClr>
+              </a:clrTo>
+            </a:clrChange>
+          </a:blip>
+          <a:srcRect l="3565" t="5568"/>
           <a:stretch>
             <a:fillRect/>
           </a:stretch>
         </p:blipFill>
         <p:spPr>
           <a:xfrm>
-            <a:off x="6375864" y="1603838"/>
-            <a:ext cx="2857429" cy="2130326"/>
+            <a:off x="4614889" y="1355813"/>
+            <a:ext cx="3195380" cy="2332806"/>
           </a:xfrm>
           <a:prstGeom prst="rect">
             <a:avLst/>
@@ -3923,15 +4972,27 @@
           <p:nvPr/>
         </p:nvPicPr>
         <p:blipFill>
-          <a:blip r:embed="rId5"/>
+          <a:blip r:embed="rId5">
+            <a:clrChange>
+              <a:clrFrom>
+                <a:srgbClr val="FFFFFF"/>
+              </a:clrFrom>
+              <a:clrTo>
+                <a:srgbClr val="FFFFFF">
+                  <a:alpha val="0"/>
+                </a:srgbClr>
+              </a:clrTo>
+            </a:clrChange>
+          </a:blip>
+          <a:srcRect l="3331" t="4950"/>
           <a:stretch>
             <a:fillRect/>
           </a:stretch>
         </p:blipFill>
         <p:spPr>
           <a:xfrm>
-            <a:off x="5695677" y="4018745"/>
-            <a:ext cx="3479713" cy="2080419"/>
+            <a:off x="3865246" y="4169585"/>
+            <a:ext cx="4046934" cy="2379006"/>
           </a:xfrm>
           <a:prstGeom prst="rect">
             <a:avLst/>
@@ -3940,28 +5001,398 @@
       </p:pic>
       <p:pic>
         <p:nvPicPr>
-          <p:cNvPr id="13" name="Image 3" descr="preencoded.png"/>
+          <p:cNvPr id="26" name="Picture 25">
+            <a:extLst>
+              <a:ext uri="{FF2B5EF4-FFF2-40B4-BE49-F238E27FC236}">
+                <a16:creationId xmlns:a16="http://schemas.microsoft.com/office/drawing/2014/main" id="{25B3117E-32F5-A8E8-B067-DCDD2ECDEFE8}"/>
+              </a:ext>
+            </a:extLst>
+          </p:cNvPr>
           <p:cNvPicPr>
             <a:picLocks noChangeAspect="1"/>
           </p:cNvPicPr>
           <p:nvPr/>
         </p:nvPicPr>
         <p:blipFill>
-          <a:blip r:embed="rId6"/>
+          <a:blip r:embed="rId6">
+            <a:clrChange>
+              <a:clrFrom>
+                <a:srgbClr val="FFFFFF"/>
+              </a:clrFrom>
+              <a:clrTo>
+                <a:srgbClr val="FFFFFF">
+                  <a:alpha val="0"/>
+                </a:srgbClr>
+              </a:clrTo>
+            </a:clrChange>
+          </a:blip>
+          <a:srcRect t="5393"/>
           <a:stretch>
             <a:fillRect/>
           </a:stretch>
         </p:blipFill>
         <p:spPr>
           <a:xfrm>
-            <a:off x="1708372" y="1471088"/>
-            <a:ext cx="2793930" cy="2219325"/>
+            <a:off x="7977101" y="2274302"/>
+            <a:ext cx="4172810" cy="2828634"/>
           </a:xfrm>
           <a:prstGeom prst="rect">
             <a:avLst/>
           </a:prstGeom>
         </p:spPr>
       </p:pic>
+      <p:sp>
+        <p:nvSpPr>
+          <p:cNvPr id="27" name="TextBox 26">
+            <a:extLst>
+              <a:ext uri="{FF2B5EF4-FFF2-40B4-BE49-F238E27FC236}">
+                <a16:creationId xmlns:a16="http://schemas.microsoft.com/office/drawing/2014/main" id="{8A17F253-4987-D692-958A-E5062405C8F1}"/>
+              </a:ext>
+            </a:extLst>
+          </p:cNvPr>
+          <p:cNvSpPr txBox="1"/>
+          <p:nvPr/>
+        </p:nvSpPr>
+        <p:spPr>
+          <a:xfrm>
+            <a:off x="5084576" y="1117297"/>
+            <a:ext cx="2688291" cy="276999"/>
+          </a:xfrm>
+          <a:prstGeom prst="rect">
+            <a:avLst/>
+          </a:prstGeom>
+          <a:noFill/>
+        </p:spPr>
+        <p:txBody>
+          <a:bodyPr wrap="square" rtlCol="0">
+            <a:spAutoFit/>
+          </a:bodyPr>
+          <a:lstStyle/>
+          <a:p>
+            <a:r>
+              <a:rPr lang="en-US" sz="1200" dirty="0"/>
+              <a:t> Top 10 coffee exporters, 2024 (</a:t>
+            </a:r>
+            <a:r>
+              <a:rPr lang="en-US" sz="1200" dirty="0" err="1"/>
+              <a:t>tonnes</a:t>
+            </a:r>
+            <a:r>
+              <a:rPr lang="en-US" sz="1200" dirty="0"/>
+              <a:t>)</a:t>
+            </a:r>
+          </a:p>
+        </p:txBody>
+      </p:sp>
+      <p:sp>
+        <p:nvSpPr>
+          <p:cNvPr id="28" name="TextBox 27">
+            <a:extLst>
+              <a:ext uri="{FF2B5EF4-FFF2-40B4-BE49-F238E27FC236}">
+                <a16:creationId xmlns:a16="http://schemas.microsoft.com/office/drawing/2014/main" id="{5A0B841F-88FD-71B3-0165-09C472BBD777}"/>
+              </a:ext>
+            </a:extLst>
+          </p:cNvPr>
+          <p:cNvSpPr txBox="1"/>
+          <p:nvPr/>
+        </p:nvSpPr>
+        <p:spPr>
+          <a:xfrm>
+            <a:off x="5084576" y="3928680"/>
+            <a:ext cx="2688291" cy="276999"/>
+          </a:xfrm>
+          <a:prstGeom prst="rect">
+            <a:avLst/>
+          </a:prstGeom>
+          <a:noFill/>
+        </p:spPr>
+        <p:txBody>
+          <a:bodyPr wrap="square" rtlCol="0">
+            <a:spAutoFit/>
+          </a:bodyPr>
+          <a:lstStyle/>
+          <a:p>
+            <a:r>
+              <a:rPr lang="en-US" sz="1200" dirty="0"/>
+              <a:t> Top 10 coffee importers, 2024 (</a:t>
+            </a:r>
+            <a:r>
+              <a:rPr lang="en-US" sz="1200" dirty="0" err="1"/>
+              <a:t>tonnes</a:t>
+            </a:r>
+            <a:r>
+              <a:rPr lang="en-US" sz="1200" dirty="0"/>
+              <a:t>)</a:t>
+            </a:r>
+          </a:p>
+        </p:txBody>
+      </p:sp>
+      <p:sp>
+        <p:nvSpPr>
+          <p:cNvPr id="29" name="TextBox 28">
+            <a:extLst>
+              <a:ext uri="{FF2B5EF4-FFF2-40B4-BE49-F238E27FC236}">
+                <a16:creationId xmlns:a16="http://schemas.microsoft.com/office/drawing/2014/main" id="{4189016F-0E07-548B-E925-9FB915C637E5}"/>
+              </a:ext>
+            </a:extLst>
+          </p:cNvPr>
+          <p:cNvSpPr txBox="1"/>
+          <p:nvPr/>
+        </p:nvSpPr>
+        <p:spPr>
+          <a:xfrm>
+            <a:off x="1150422" y="1114908"/>
+            <a:ext cx="2688291" cy="276999"/>
+          </a:xfrm>
+          <a:prstGeom prst="rect">
+            <a:avLst/>
+          </a:prstGeom>
+          <a:noFill/>
+        </p:spPr>
+        <p:txBody>
+          <a:bodyPr wrap="square" rtlCol="0">
+            <a:spAutoFit/>
+          </a:bodyPr>
+          <a:lstStyle/>
+          <a:p>
+            <a:r>
+              <a:rPr lang="en-US" sz="1200" dirty="0"/>
+              <a:t> Top 10 coffee producers, 2024 (</a:t>
+            </a:r>
+            <a:r>
+              <a:rPr lang="en-US" sz="1200" dirty="0" err="1"/>
+              <a:t>tonnes</a:t>
+            </a:r>
+            <a:r>
+              <a:rPr lang="en-US" sz="1200" dirty="0"/>
+              <a:t>)</a:t>
+            </a:r>
+          </a:p>
+        </p:txBody>
+      </p:sp>
+      <p:sp>
+        <p:nvSpPr>
+          <p:cNvPr id="30" name="TextBox 29">
+            <a:extLst>
+              <a:ext uri="{FF2B5EF4-FFF2-40B4-BE49-F238E27FC236}">
+                <a16:creationId xmlns:a16="http://schemas.microsoft.com/office/drawing/2014/main" id="{A6F548C0-455B-7DEF-DA90-D380E0AE17F6}"/>
+              </a:ext>
+            </a:extLst>
+          </p:cNvPr>
+          <p:cNvSpPr txBox="1"/>
+          <p:nvPr/>
+        </p:nvSpPr>
+        <p:spPr>
+          <a:xfrm>
+            <a:off x="8761449" y="1903009"/>
+            <a:ext cx="2688291" cy="276999"/>
+          </a:xfrm>
+          <a:prstGeom prst="rect">
+            <a:avLst/>
+          </a:prstGeom>
+          <a:noFill/>
+        </p:spPr>
+        <p:txBody>
+          <a:bodyPr wrap="square" rtlCol="0">
+            <a:spAutoFit/>
+          </a:bodyPr>
+          <a:lstStyle/>
+          <a:p>
+            <a:r>
+              <a:rPr lang="en-US" sz="1200" dirty="0"/>
+              <a:t>Yield vs export price, 2024 (</a:t>
+            </a:r>
+            <a:r>
+              <a:rPr lang="en-US" sz="1200" dirty="0" err="1"/>
+              <a:t>tonnes</a:t>
+            </a:r>
+            <a:r>
+              <a:rPr lang="en-US" sz="1200" dirty="0"/>
+              <a:t>)</a:t>
+            </a:r>
+          </a:p>
+        </p:txBody>
+      </p:sp>
+      <p:pic>
+        <p:nvPicPr>
+          <p:cNvPr id="32" name="Picture 31">
+            <a:extLst>
+              <a:ext uri="{FF2B5EF4-FFF2-40B4-BE49-F238E27FC236}">
+                <a16:creationId xmlns:a16="http://schemas.microsoft.com/office/drawing/2014/main" id="{34D96DF7-3744-FEB5-E5F8-E527518110E8}"/>
+              </a:ext>
+            </a:extLst>
+          </p:cNvPr>
+          <p:cNvPicPr>
+            <a:picLocks noChangeAspect="1"/>
+          </p:cNvPicPr>
+          <p:nvPr/>
+        </p:nvPicPr>
+        <p:blipFill>
+          <a:blip r:embed="rId7"/>
+          <a:srcRect t="4014"/>
+          <a:stretch>
+            <a:fillRect/>
+          </a:stretch>
+        </p:blipFill>
+        <p:spPr>
+          <a:xfrm>
+            <a:off x="65925" y="4208267"/>
+            <a:ext cx="3734400" cy="2301641"/>
+          </a:xfrm>
+          <a:prstGeom prst="rect">
+            <a:avLst/>
+          </a:prstGeom>
+        </p:spPr>
+      </p:pic>
+      <p:sp>
+        <p:nvSpPr>
+          <p:cNvPr id="33" name="TextBox 32">
+            <a:extLst>
+              <a:ext uri="{FF2B5EF4-FFF2-40B4-BE49-F238E27FC236}">
+                <a16:creationId xmlns:a16="http://schemas.microsoft.com/office/drawing/2014/main" id="{E2851FF6-8107-1C4F-B346-551866997A78}"/>
+              </a:ext>
+            </a:extLst>
+          </p:cNvPr>
+          <p:cNvSpPr txBox="1"/>
+          <p:nvPr/>
+        </p:nvSpPr>
+        <p:spPr>
+          <a:xfrm>
+            <a:off x="262759" y="3928679"/>
+            <a:ext cx="3741799" cy="276999"/>
+          </a:xfrm>
+          <a:prstGeom prst="rect">
+            <a:avLst/>
+          </a:prstGeom>
+          <a:noFill/>
+        </p:spPr>
+        <p:txBody>
+          <a:bodyPr wrap="square" rtlCol="0">
+            <a:spAutoFit/>
+          </a:bodyPr>
+          <a:lstStyle/>
+          <a:p>
+            <a:r>
+              <a:rPr lang="en-US" sz="1200" dirty="0"/>
+              <a:t> Top 10 processed-green beans volume  , 2024 (</a:t>
+            </a:r>
+            <a:r>
+              <a:rPr lang="en-US" sz="1200" dirty="0" err="1"/>
+              <a:t>tonnes</a:t>
+            </a:r>
+            <a:r>
+              <a:rPr lang="en-US" sz="1200" dirty="0"/>
+              <a:t>)</a:t>
+            </a:r>
+          </a:p>
+        </p:txBody>
+      </p:sp>
+      <p:sp>
+        <p:nvSpPr>
+          <p:cNvPr id="36" name="TextBox 35">
+            <a:extLst>
+              <a:ext uri="{FF2B5EF4-FFF2-40B4-BE49-F238E27FC236}">
+                <a16:creationId xmlns:a16="http://schemas.microsoft.com/office/drawing/2014/main" id="{DE3E16B4-A0F3-1C6B-31C6-848ED6083F9F}"/>
+              </a:ext>
+            </a:extLst>
+          </p:cNvPr>
+          <p:cNvSpPr txBox="1"/>
+          <p:nvPr/>
+        </p:nvSpPr>
+        <p:spPr>
+          <a:xfrm>
+            <a:off x="0" y="20750"/>
+            <a:ext cx="12192000" cy="236155"/>
+          </a:xfrm>
+          <a:prstGeom prst="rect">
+            <a:avLst/>
+          </a:prstGeom>
+          <a:noFill/>
+        </p:spPr>
+        <p:txBody>
+          <a:bodyPr wrap="square">
+            <a:spAutoFit/>
+          </a:bodyPr>
+          <a:lstStyle/>
+          <a:p>
+            <a:pPr algn="ctr">
+              <a:lnSpc>
+                <a:spcPct val="108000"/>
+              </a:lnSpc>
+            </a:pPr>
+            <a:r>
+              <a:rPr lang="en-US" sz="900" kern="0" spc="50" dirty="0">
+                <a:solidFill>
+                  <a:schemeClr val="bg2">
+                    <a:lumMod val="90000"/>
+                  </a:schemeClr>
+                </a:solidFill>
+                <a:latin typeface="Red Hat Mono Medium" pitchFamily="34" charset="0"/>
+                <a:ea typeface="Red Hat Mono Medium" pitchFamily="34" charset="-122"/>
+                <a:cs typeface="Red Hat Mono Medium" pitchFamily="34" charset="-120"/>
+              </a:rPr>
+              <a:t>- COFFEE LAND VS PRICE -</a:t>
+            </a:r>
+            <a:endParaRPr lang="en-US" sz="900" dirty="0">
+              <a:solidFill>
+                <a:schemeClr val="bg2">
+                  <a:lumMod val="90000"/>
+                </a:schemeClr>
+              </a:solidFill>
+            </a:endParaRPr>
+          </a:p>
+        </p:txBody>
+      </p:sp>
+      <p:sp>
+        <p:nvSpPr>
+          <p:cNvPr id="40" name="TextBox 39">
+            <a:extLst>
+              <a:ext uri="{FF2B5EF4-FFF2-40B4-BE49-F238E27FC236}">
+                <a16:creationId xmlns:a16="http://schemas.microsoft.com/office/drawing/2014/main" id="{5808F582-E184-B6C2-E913-998117339970}"/>
+              </a:ext>
+            </a:extLst>
+          </p:cNvPr>
+          <p:cNvSpPr txBox="1"/>
+          <p:nvPr/>
+        </p:nvSpPr>
+        <p:spPr>
+          <a:xfrm>
+            <a:off x="0" y="6633454"/>
+            <a:ext cx="12192000" cy="236155"/>
+          </a:xfrm>
+          <a:prstGeom prst="rect">
+            <a:avLst/>
+          </a:prstGeom>
+          <a:noFill/>
+        </p:spPr>
+        <p:txBody>
+          <a:bodyPr wrap="square">
+            <a:spAutoFit/>
+          </a:bodyPr>
+          <a:lstStyle/>
+          <a:p>
+            <a:pPr algn="ctr">
+              <a:lnSpc>
+                <a:spcPct val="108000"/>
+              </a:lnSpc>
+            </a:pPr>
+            <a:r>
+              <a:rPr lang="en-US" sz="900" kern="0" spc="50" dirty="0">
+                <a:solidFill>
+                  <a:schemeClr val="bg2">
+                    <a:lumMod val="90000"/>
+                  </a:schemeClr>
+                </a:solidFill>
+                <a:latin typeface="Red Hat Mono Medium" pitchFamily="34" charset="0"/>
+                <a:ea typeface="Red Hat Mono Medium" pitchFamily="34" charset="-122"/>
+                <a:cs typeface="Red Hat Mono Medium" pitchFamily="34" charset="-120"/>
+              </a:rPr>
+              <a:t>IRONHACK | WEEK 3 | PROJECT 1 | EDA &amp; SQL PROJECT PRESENTATION by RIZKI FIRDAUS | FRIDAY, 2 OCTOBER 2026</a:t>
+            </a:r>
+            <a:endParaRPr lang="en-US" sz="900" dirty="0"/>
+          </a:p>
+        </p:txBody>
+      </p:sp>
     </p:spTree>
   </p:cSld>
   <p:clrMapOvr>
@@ -3989,20 +5420,26 @@
       </p:grpSpPr>
       <p:sp>
         <p:nvSpPr>
-          <p:cNvPr id="2" name="Shape 0"/>
+          <p:cNvPr id="18" name="Shape 0">
+            <a:extLst>
+              <a:ext uri="{FF2B5EF4-FFF2-40B4-BE49-F238E27FC236}">
+                <a16:creationId xmlns:a16="http://schemas.microsoft.com/office/drawing/2014/main" id="{9BBE7B19-2E7A-B600-A471-877D2650F815}"/>
+              </a:ext>
+            </a:extLst>
+          </p:cNvPr>
           <p:cNvSpPr/>
           <p:nvPr/>
         </p:nvSpPr>
         <p:spPr>
           <a:xfrm>
-            <a:off x="0" y="178395"/>
-            <a:ext cx="12191695" cy="894159"/>
+            <a:off x="0" y="0"/>
+            <a:ext cx="12192000" cy="6858000"/>
           </a:xfrm>
           <a:prstGeom prst="rect">
             <a:avLst/>
           </a:prstGeom>
           <a:solidFill>
-            <a:srgbClr val="F1F2F4"/>
+            <a:srgbClr val="FAFAF8"/>
           </a:solidFill>
           <a:ln/>
         </p:spPr>
@@ -4022,8 +5459,8 @@
         </p:nvSpPr>
         <p:spPr>
           <a:xfrm>
-            <a:off x="152296" y="423962"/>
-            <a:ext cx="11886903" cy="530820"/>
+            <a:off x="494551" y="517291"/>
+            <a:ext cx="3400107" cy="530820"/>
           </a:xfrm>
           <a:prstGeom prst="rect">
             <a:avLst/>
@@ -4058,68 +5495,14 @@
       </p:sp>
       <p:sp>
         <p:nvSpPr>
-          <p:cNvPr id="4" name="Shape 2"/>
-          <p:cNvSpPr/>
-          <p:nvPr/>
-        </p:nvSpPr>
-        <p:spPr>
-          <a:xfrm>
-            <a:off x="0" y="1046460"/>
-            <a:ext cx="12191695" cy="5811540"/>
-          </a:xfrm>
-          <a:prstGeom prst="rect">
-            <a:avLst/>
-          </a:prstGeom>
-          <a:solidFill>
-            <a:srgbClr val="F1F2F4"/>
-          </a:solidFill>
-          <a:ln/>
-        </p:spPr>
-        <p:txBody>
-          <a:bodyPr/>
-          <a:lstStyle/>
-          <a:p>
-            <a:endParaRPr lang="en-US"/>
-          </a:p>
-        </p:txBody>
-      </p:sp>
-      <p:sp>
-        <p:nvSpPr>
-          <p:cNvPr id="5" name="Shape 3"/>
-          <p:cNvSpPr/>
-          <p:nvPr/>
-        </p:nvSpPr>
-        <p:spPr>
-          <a:xfrm>
-            <a:off x="152396" y="1198860"/>
-            <a:ext cx="6553204" cy="2677120"/>
-          </a:xfrm>
-          <a:prstGeom prst="rect">
-            <a:avLst/>
-          </a:prstGeom>
-          <a:solidFill>
-            <a:srgbClr val="FFFFFF"/>
-          </a:solidFill>
-          <a:ln/>
-        </p:spPr>
-        <p:txBody>
-          <a:bodyPr/>
-          <a:lstStyle/>
-          <a:p>
-            <a:endParaRPr lang="en-US"/>
-          </a:p>
-        </p:txBody>
-      </p:sp>
-      <p:sp>
-        <p:nvSpPr>
           <p:cNvPr id="6" name="Text 4"/>
           <p:cNvSpPr/>
           <p:nvPr/>
         </p:nvSpPr>
         <p:spPr>
           <a:xfrm>
-            <a:off x="304792" y="1503560"/>
-            <a:ext cx="6482078" cy="639961"/>
+            <a:off x="494551" y="1472601"/>
+            <a:ext cx="5367725" cy="357608"/>
           </a:xfrm>
           <a:prstGeom prst="rect">
             <a:avLst/>
@@ -4140,7 +5523,7 @@
               <a:buNone/>
             </a:pPr>
             <a:r>
-              <a:rPr lang="en-US" b="1" dirty="0">
+              <a:rPr lang="en-US" sz="1500" b="1" dirty="0">
                 <a:solidFill>
                   <a:srgbClr val="000000"/>
                 </a:solidFill>
@@ -4150,7 +5533,7 @@
               </a:rPr>
               <a:t>Do more land or higher yield mean a lower export price?</a:t>
             </a:r>
-            <a:endParaRPr lang="en-US" dirty="0"/>
+            <a:endParaRPr lang="en-US" sz="1500" dirty="0"/>
           </a:p>
         </p:txBody>
       </p:sp>
@@ -4162,7 +5545,7 @@
         </p:nvSpPr>
         <p:spPr>
           <a:xfrm>
-            <a:off x="647815" y="2083692"/>
+            <a:off x="626364" y="1851371"/>
             <a:ext cx="5562362" cy="1346101"/>
           </a:xfrm>
           <a:prstGeom prst="rect">
@@ -4378,41 +5761,14 @@
       </p:sp>
       <p:sp>
         <p:nvSpPr>
-          <p:cNvPr id="9" name="Shape 7"/>
-          <p:cNvSpPr/>
-          <p:nvPr/>
-        </p:nvSpPr>
-        <p:spPr>
-          <a:xfrm>
-            <a:off x="152395" y="3998803"/>
-            <a:ext cx="6553203" cy="2677220"/>
-          </a:xfrm>
-          <a:prstGeom prst="rect">
-            <a:avLst/>
-          </a:prstGeom>
-          <a:solidFill>
-            <a:srgbClr val="FFFFFF"/>
-          </a:solidFill>
-          <a:ln/>
-        </p:spPr>
-        <p:txBody>
-          <a:bodyPr/>
-          <a:lstStyle/>
-          <a:p>
-            <a:endParaRPr lang="en-US"/>
-          </a:p>
-        </p:txBody>
-      </p:sp>
-      <p:sp>
-        <p:nvSpPr>
           <p:cNvPr id="10" name="Text 8"/>
           <p:cNvSpPr/>
           <p:nvPr/>
         </p:nvSpPr>
         <p:spPr>
           <a:xfrm>
-            <a:off x="304792" y="4204007"/>
-            <a:ext cx="6400806" cy="639961"/>
+            <a:off x="494551" y="4219656"/>
+            <a:ext cx="5340742" cy="333998"/>
           </a:xfrm>
           <a:prstGeom prst="rect">
             <a:avLst/>
@@ -4433,7 +5789,7 @@
               <a:buNone/>
             </a:pPr>
             <a:r>
-              <a:rPr lang="en-US" b="1" dirty="0">
+              <a:rPr lang="en-US" sz="1500" b="1" dirty="0">
                 <a:solidFill>
                   <a:srgbClr val="000000"/>
                 </a:solidFill>
@@ -4443,7 +5799,7 @@
               </a:rPr>
               <a:t>Do importers pay more per kg than exporters receive?</a:t>
             </a:r>
-            <a:endParaRPr lang="en-US" dirty="0"/>
+            <a:endParaRPr lang="en-US" sz="1500" dirty="0"/>
           </a:p>
         </p:txBody>
       </p:sp>
@@ -4455,8 +5811,8 @@
         </p:nvSpPr>
         <p:spPr>
           <a:xfrm>
-            <a:off x="647815" y="5167957"/>
-            <a:ext cx="5562362" cy="770830"/>
+            <a:off x="624075" y="4638428"/>
+            <a:ext cx="5443964" cy="1117514"/>
           </a:xfrm>
           <a:prstGeom prst="rect">
             <a:avLst/>
@@ -4466,7 +5822,7 @@
         </p:spPr>
         <p:txBody>
           <a:bodyPr wrap="square" lIns="0" tIns="0" rIns="0" bIns="0" rtlCol="0" anchor="t">
-            <a:normAutofit/>
+            <a:normAutofit fontScale="92500" lnSpcReduction="20000"/>
           </a:bodyPr>
           <a:lstStyle/>
           <a:p>
@@ -4587,34 +5943,75 @@
               </a:rPr>
               <a:t>.</a:t>
             </a:r>
-            <a:endParaRPr lang="en-US" sz="1100" dirty="0"/>
-          </a:p>
-        </p:txBody>
-      </p:sp>
-      <p:sp>
-        <p:nvSpPr>
-          <p:cNvPr id="13" name="Shape 11"/>
-          <p:cNvSpPr/>
-          <p:nvPr/>
-        </p:nvSpPr>
-        <p:spPr>
-          <a:xfrm>
-            <a:off x="6944107" y="1138237"/>
-            <a:ext cx="4831334" cy="2677120"/>
-          </a:xfrm>
-          <a:prstGeom prst="rect">
-            <a:avLst/>
-          </a:prstGeom>
-          <a:solidFill>
-            <a:srgbClr val="FFFFFF"/>
-          </a:solidFill>
-          <a:ln/>
-        </p:spPr>
-        <p:txBody>
-          <a:bodyPr/>
-          <a:lstStyle/>
-          <a:p>
-            <a:endParaRPr lang="en-US"/>
+          </a:p>
+          <a:p>
+            <a:pPr marL="0" indent="0" algn="l">
+              <a:lnSpc>
+                <a:spcPct val="117000"/>
+              </a:lnSpc>
+              <a:buNone/>
+            </a:pPr>
+            <a:endParaRPr lang="en-US" sz="1100" dirty="0">
+              <a:solidFill>
+                <a:srgbClr val="000000"/>
+              </a:solidFill>
+              <a:latin typeface="Schibsted Grotesk" pitchFamily="34" charset="0"/>
+              <a:cs typeface="Schibsted Grotesk" pitchFamily="34" charset="-120"/>
+            </a:endParaRPr>
+          </a:p>
+          <a:p>
+            <a:pPr marL="0" indent="0" algn="l">
+              <a:lnSpc>
+                <a:spcPct val="117000"/>
+              </a:lnSpc>
+              <a:buNone/>
+            </a:pPr>
+            <a:r>
+              <a:rPr lang="en-US" sz="1100" dirty="0">
+                <a:solidFill>
+                  <a:srgbClr val="000000"/>
+                </a:solidFill>
+                <a:latin typeface="Schibsted Grotesk" pitchFamily="34" charset="0"/>
+                <a:cs typeface="Schibsted Grotesk" pitchFamily="34" charset="-120"/>
+              </a:rPr>
+              <a:t>• FAIR TRADE</a:t>
+            </a:r>
+          </a:p>
+          <a:p>
+            <a:pPr marL="0" indent="0" algn="l">
+              <a:lnSpc>
+                <a:spcPct val="117000"/>
+              </a:lnSpc>
+              <a:buNone/>
+            </a:pPr>
+            <a:r>
+              <a:rPr lang="en-US" sz="1100" dirty="0">
+                <a:solidFill>
+                  <a:srgbClr val="000000"/>
+                </a:solidFill>
+                <a:latin typeface="Schibsted Grotesk" pitchFamily="34" charset="0"/>
+                <a:cs typeface="Schibsted Grotesk" pitchFamily="34" charset="-120"/>
+              </a:rPr>
+              <a:t>• DIRECT TRADE</a:t>
+            </a:r>
+          </a:p>
+          <a:p>
+            <a:pPr marL="0" indent="0" algn="l">
+              <a:lnSpc>
+                <a:spcPct val="117000"/>
+              </a:lnSpc>
+              <a:buNone/>
+            </a:pPr>
+            <a:r>
+              <a:rPr lang="en-US" sz="1100" dirty="0">
+                <a:solidFill>
+                  <a:srgbClr val="000000"/>
+                </a:solidFill>
+                <a:latin typeface="Schibsted Grotesk" pitchFamily="34" charset="0"/>
+                <a:cs typeface="Schibsted Grotesk" pitchFamily="34" charset="-120"/>
+              </a:rPr>
+              <a:t>• FARM TO TABLE</a:t>
+            </a:r>
           </a:p>
         </p:txBody>
       </p:sp>
@@ -4627,48 +6024,33 @@
           <p:nvPr/>
         </p:nvPicPr>
         <p:blipFill>
-          <a:blip r:embed="rId3"/>
+          <a:blip r:embed="rId3">
+            <a:clrChange>
+              <a:clrFrom>
+                <a:srgbClr val="FFFFFF"/>
+              </a:clrFrom>
+              <a:clrTo>
+                <a:srgbClr val="FFFFFF">
+                  <a:alpha val="0"/>
+                </a:srgbClr>
+              </a:clrTo>
+            </a:clrChange>
+          </a:blip>
+          <a:srcRect l="-1" r="621"/>
           <a:stretch>
             <a:fillRect/>
           </a:stretch>
         </p:blipFill>
         <p:spPr>
           <a:xfrm>
-            <a:off x="7071103" y="1233587"/>
-            <a:ext cx="4254394" cy="2559546"/>
+            <a:off x="6329726" y="245026"/>
+            <a:ext cx="5709977" cy="3456728"/>
           </a:xfrm>
           <a:prstGeom prst="rect">
             <a:avLst/>
           </a:prstGeom>
         </p:spPr>
       </p:pic>
-      <p:sp>
-        <p:nvSpPr>
-          <p:cNvPr id="15" name="Shape 12"/>
-          <p:cNvSpPr/>
-          <p:nvPr/>
-        </p:nvSpPr>
-        <p:spPr>
-          <a:xfrm>
-            <a:off x="6944107" y="4002385"/>
-            <a:ext cx="4831334" cy="2677220"/>
-          </a:xfrm>
-          <a:prstGeom prst="rect">
-            <a:avLst/>
-          </a:prstGeom>
-          <a:solidFill>
-            <a:srgbClr val="FFFFFF"/>
-          </a:solidFill>
-          <a:ln/>
-        </p:spPr>
-        <p:txBody>
-          <a:bodyPr/>
-          <a:lstStyle/>
-          <a:p>
-            <a:endParaRPr lang="en-US"/>
-          </a:p>
-        </p:txBody>
-      </p:sp>
       <p:pic>
         <p:nvPicPr>
           <p:cNvPr id="16" name="Image 1" descr="preencoded.png"/>
@@ -4678,22 +6060,768 @@
           <p:nvPr/>
         </p:nvPicPr>
         <p:blipFill>
-          <a:blip r:embed="rId4"/>
+          <a:blip r:embed="rId4">
+            <a:clrChange>
+              <a:clrFrom>
+                <a:srgbClr val="FFFFFF"/>
+              </a:clrFrom>
+              <a:clrTo>
+                <a:srgbClr val="FFFFFF">
+                  <a:alpha val="0"/>
+                </a:srgbClr>
+              </a:clrTo>
+            </a:clrChange>
+          </a:blip>
           <a:stretch>
             <a:fillRect/>
           </a:stretch>
         </p:blipFill>
         <p:spPr>
           <a:xfrm>
-            <a:off x="7071103" y="4129385"/>
-            <a:ext cx="4254394" cy="2077145"/>
+            <a:off x="6356709" y="3888577"/>
+            <a:ext cx="5676147" cy="2771295"/>
           </a:xfrm>
           <a:prstGeom prst="rect">
             <a:avLst/>
           </a:prstGeom>
         </p:spPr>
       </p:pic>
+      <p:cxnSp>
+        <p:nvCxnSpPr>
+          <p:cNvPr id="19" name="Straight Connector 18">
+            <a:extLst>
+              <a:ext uri="{FF2B5EF4-FFF2-40B4-BE49-F238E27FC236}">
+                <a16:creationId xmlns:a16="http://schemas.microsoft.com/office/drawing/2014/main" id="{A3E5A355-D875-A094-30CD-C057A54CEE46}"/>
+              </a:ext>
+            </a:extLst>
+          </p:cNvPr>
+          <p:cNvCxnSpPr>
+            <a:cxnSpLocks/>
+          </p:cNvCxnSpPr>
+          <p:nvPr/>
+        </p:nvCxnSpPr>
+        <p:spPr>
+          <a:xfrm flipH="1">
+            <a:off x="304792" y="3795165"/>
+            <a:ext cx="11788202" cy="0"/>
+          </a:xfrm>
+          <a:prstGeom prst="line">
+            <a:avLst/>
+          </a:prstGeom>
+          <a:ln>
+            <a:solidFill>
+              <a:schemeClr val="bg1">
+                <a:lumMod val="85000"/>
+              </a:schemeClr>
+            </a:solidFill>
+          </a:ln>
+        </p:spPr>
+        <p:style>
+          <a:lnRef idx="1">
+            <a:schemeClr val="dk1"/>
+          </a:lnRef>
+          <a:fillRef idx="0">
+            <a:schemeClr val="dk1"/>
+          </a:fillRef>
+          <a:effectRef idx="0">
+            <a:schemeClr val="dk1"/>
+          </a:effectRef>
+          <a:fontRef idx="minor">
+            <a:schemeClr val="tx1"/>
+          </a:fontRef>
+        </p:style>
+      </p:cxnSp>
+      <p:sp>
+        <p:nvSpPr>
+          <p:cNvPr id="29" name="TextBox 28">
+            <a:extLst>
+              <a:ext uri="{FF2B5EF4-FFF2-40B4-BE49-F238E27FC236}">
+                <a16:creationId xmlns:a16="http://schemas.microsoft.com/office/drawing/2014/main" id="{5282EA31-4C21-3D79-DBE8-D4FCFEC717EC}"/>
+              </a:ext>
+            </a:extLst>
+          </p:cNvPr>
+          <p:cNvSpPr txBox="1"/>
+          <p:nvPr/>
+        </p:nvSpPr>
+        <p:spPr>
+          <a:xfrm>
+            <a:off x="0" y="20750"/>
+            <a:ext cx="12192000" cy="236155"/>
+          </a:xfrm>
+          <a:prstGeom prst="rect">
+            <a:avLst/>
+          </a:prstGeom>
+          <a:noFill/>
+        </p:spPr>
+        <p:txBody>
+          <a:bodyPr wrap="square">
+            <a:spAutoFit/>
+          </a:bodyPr>
+          <a:lstStyle/>
+          <a:p>
+            <a:pPr algn="ctr">
+              <a:lnSpc>
+                <a:spcPct val="108000"/>
+              </a:lnSpc>
+            </a:pPr>
+            <a:r>
+              <a:rPr lang="en-US" sz="900" kern="0" spc="50" dirty="0">
+                <a:solidFill>
+                  <a:schemeClr val="bg2">
+                    <a:lumMod val="90000"/>
+                  </a:schemeClr>
+                </a:solidFill>
+                <a:latin typeface="Red Hat Mono Medium" pitchFamily="34" charset="0"/>
+                <a:ea typeface="Red Hat Mono Medium" pitchFamily="34" charset="-122"/>
+                <a:cs typeface="Red Hat Mono Medium" pitchFamily="34" charset="-120"/>
+              </a:rPr>
+              <a:t>- COFFEE LAND VS PRICE -</a:t>
+            </a:r>
+            <a:endParaRPr lang="en-US" sz="900" dirty="0">
+              <a:solidFill>
+                <a:schemeClr val="bg2">
+                  <a:lumMod val="90000"/>
+                </a:schemeClr>
+              </a:solidFill>
+            </a:endParaRPr>
+          </a:p>
+        </p:txBody>
+      </p:sp>
+      <p:sp>
+        <p:nvSpPr>
+          <p:cNvPr id="32" name="TextBox 31">
+            <a:extLst>
+              <a:ext uri="{FF2B5EF4-FFF2-40B4-BE49-F238E27FC236}">
+                <a16:creationId xmlns:a16="http://schemas.microsoft.com/office/drawing/2014/main" id="{BDAE3E44-CFC7-1A63-B5B9-0ADFCED53A73}"/>
+              </a:ext>
+            </a:extLst>
+          </p:cNvPr>
+          <p:cNvSpPr txBox="1"/>
+          <p:nvPr/>
+        </p:nvSpPr>
+        <p:spPr>
+          <a:xfrm>
+            <a:off x="0" y="6633454"/>
+            <a:ext cx="12192000" cy="236155"/>
+          </a:xfrm>
+          <a:prstGeom prst="rect">
+            <a:avLst/>
+          </a:prstGeom>
+          <a:noFill/>
+        </p:spPr>
+        <p:txBody>
+          <a:bodyPr wrap="square">
+            <a:spAutoFit/>
+          </a:bodyPr>
+          <a:lstStyle/>
+          <a:p>
+            <a:pPr algn="ctr">
+              <a:lnSpc>
+                <a:spcPct val="108000"/>
+              </a:lnSpc>
+            </a:pPr>
+            <a:r>
+              <a:rPr lang="en-US" sz="900" kern="0" spc="50" dirty="0">
+                <a:solidFill>
+                  <a:schemeClr val="bg2">
+                    <a:lumMod val="90000"/>
+                  </a:schemeClr>
+                </a:solidFill>
+                <a:latin typeface="Red Hat Mono Medium" pitchFamily="34" charset="0"/>
+                <a:ea typeface="Red Hat Mono Medium" pitchFamily="34" charset="-122"/>
+                <a:cs typeface="Red Hat Mono Medium" pitchFamily="34" charset="-120"/>
+              </a:rPr>
+              <a:t>IRONHACK | WEEK 3 | PROJECT 1 | EDA &amp; SQL PROJECT PRESENTATION by RIZKI FIRDAUS | FRIDAY, 2 OCTOBER 2026</a:t>
+            </a:r>
+            <a:endParaRPr lang="en-US" sz="900" dirty="0"/>
+          </a:p>
+        </p:txBody>
+      </p:sp>
     </p:spTree>
+  </p:cSld>
+  <p:clrMapOvr>
+    <a:masterClrMapping/>
+  </p:clrMapOvr>
+</p:sld>
+</file>
+
+<file path=ppt/slides/slide8.xml><?xml version="1.0" encoding="utf-8"?>
+<p:sld xmlns:a="http://schemas.openxmlformats.org/drawingml/2006/main" xmlns:r="http://schemas.openxmlformats.org/officeDocument/2006/relationships" xmlns:p="http://schemas.openxmlformats.org/presentationml/2006/main">
+  <p:cSld>
+    <p:spTree>
+      <p:nvGrpSpPr>
+        <p:cNvPr id="1" name=""/>
+        <p:cNvGrpSpPr/>
+        <p:nvPr/>
+      </p:nvGrpSpPr>
+      <p:grpSpPr>
+        <a:xfrm>
+          <a:off x="0" y="0"/>
+          <a:ext cx="0" cy="0"/>
+          <a:chOff x="0" y="0"/>
+          <a:chExt cx="0" cy="0"/>
+        </a:xfrm>
+      </p:grpSpPr>
+      <p:sp>
+        <p:nvSpPr>
+          <p:cNvPr id="3" name="Shape 0">
+            <a:extLst>
+              <a:ext uri="{FF2B5EF4-FFF2-40B4-BE49-F238E27FC236}">
+                <a16:creationId xmlns:a16="http://schemas.microsoft.com/office/drawing/2014/main" id="{34AB8E9A-EABE-2B33-4A8B-165C09054B81}"/>
+              </a:ext>
+            </a:extLst>
+          </p:cNvPr>
+          <p:cNvSpPr/>
+          <p:nvPr/>
+        </p:nvSpPr>
+        <p:spPr>
+          <a:xfrm>
+            <a:off x="0" y="0"/>
+            <a:ext cx="12192000" cy="6858000"/>
+          </a:xfrm>
+          <a:prstGeom prst="rect">
+            <a:avLst/>
+          </a:prstGeom>
+          <a:solidFill>
+            <a:srgbClr val="FAFAF8"/>
+          </a:solidFill>
+          <a:ln/>
+        </p:spPr>
+        <p:txBody>
+          <a:bodyPr/>
+          <a:lstStyle/>
+          <a:p>
+            <a:endParaRPr lang="en-US" dirty="0"/>
+          </a:p>
+        </p:txBody>
+      </p:sp>
+      <p:sp>
+        <p:nvSpPr>
+          <p:cNvPr id="2" name="Text 1">
+            <a:extLst>
+              <a:ext uri="{FF2B5EF4-FFF2-40B4-BE49-F238E27FC236}">
+                <a16:creationId xmlns:a16="http://schemas.microsoft.com/office/drawing/2014/main" id="{96871236-8E0A-9E7E-586A-99FF3A1C9BED}"/>
+              </a:ext>
+            </a:extLst>
+          </p:cNvPr>
+          <p:cNvSpPr/>
+          <p:nvPr/>
+        </p:nvSpPr>
+        <p:spPr>
+          <a:xfrm>
+            <a:off x="2060028" y="2893697"/>
+            <a:ext cx="3415862" cy="530820"/>
+          </a:xfrm>
+          <a:prstGeom prst="rect">
+            <a:avLst/>
+          </a:prstGeom>
+          <a:noFill/>
+          <a:ln/>
+        </p:spPr>
+        <p:txBody>
+          <a:bodyPr wrap="none" lIns="0" tIns="0" rIns="0" bIns="0" rtlCol="0" anchor="t"/>
+          <a:lstStyle/>
+          <a:p>
+            <a:pPr marL="0" indent="0">
+              <a:lnSpc>
+                <a:spcPct val="79000"/>
+              </a:lnSpc>
+              <a:buNone/>
+            </a:pPr>
+            <a:r>
+              <a:rPr lang="en-US" sz="4400" dirty="0">
+                <a:solidFill>
+                  <a:srgbClr val="000000"/>
+                </a:solidFill>
+                <a:latin typeface="Big Shoulders ExtraBold" pitchFamily="34" charset="0"/>
+                <a:ea typeface="Big Shoulders ExtraBold" pitchFamily="34" charset="-122"/>
+                <a:cs typeface="Big Shoulders ExtraBold" pitchFamily="34" charset="-120"/>
+              </a:rPr>
+              <a:t>WHATS NEXT</a:t>
+            </a:r>
+            <a:endParaRPr lang="en-US" sz="4400" dirty="0"/>
+          </a:p>
+        </p:txBody>
+      </p:sp>
+      <p:sp>
+        <p:nvSpPr>
+          <p:cNvPr id="4" name="TextBox 3">
+            <a:extLst>
+              <a:ext uri="{FF2B5EF4-FFF2-40B4-BE49-F238E27FC236}">
+                <a16:creationId xmlns:a16="http://schemas.microsoft.com/office/drawing/2014/main" id="{C0B6BE68-7D79-3404-39F0-58F561765974}"/>
+              </a:ext>
+            </a:extLst>
+          </p:cNvPr>
+          <p:cNvSpPr txBox="1"/>
+          <p:nvPr/>
+        </p:nvSpPr>
+        <p:spPr>
+          <a:xfrm>
+            <a:off x="2060028" y="3670738"/>
+            <a:ext cx="7294179" cy="1200329"/>
+          </a:xfrm>
+          <a:prstGeom prst="rect">
+            <a:avLst/>
+          </a:prstGeom>
+          <a:noFill/>
+        </p:spPr>
+        <p:txBody>
+          <a:bodyPr wrap="square" rtlCol="0">
+            <a:spAutoFit/>
+          </a:bodyPr>
+          <a:lstStyle/>
+          <a:p>
+            <a:r>
+              <a:rPr lang="en-US" dirty="0"/>
+              <a:t>• Arabica vs. robusta is not distinguished in the data.</a:t>
+            </a:r>
+          </a:p>
+          <a:p>
+            <a:endParaRPr lang="en-US" dirty="0"/>
+          </a:p>
+          <a:p>
+            <a:pPr lvl="0"/>
+            <a:r>
+              <a:rPr lang="en-US" dirty="0"/>
+              <a:t>• Build a tech-access index and re-run the yield–price test against the total yield of coffee farmers with ‘better tech’.</a:t>
+            </a:r>
+          </a:p>
+        </p:txBody>
+      </p:sp>
+      <p:sp>
+        <p:nvSpPr>
+          <p:cNvPr id="6" name="TextBox 5">
+            <a:extLst>
+              <a:ext uri="{FF2B5EF4-FFF2-40B4-BE49-F238E27FC236}">
+                <a16:creationId xmlns:a16="http://schemas.microsoft.com/office/drawing/2014/main" id="{CFC80ACC-EEA5-A1ED-DC0E-F0BCD4E1C66F}"/>
+              </a:ext>
+            </a:extLst>
+          </p:cNvPr>
+          <p:cNvSpPr txBox="1"/>
+          <p:nvPr/>
+        </p:nvSpPr>
+        <p:spPr>
+          <a:xfrm>
+            <a:off x="0" y="6617362"/>
+            <a:ext cx="12192000" cy="236155"/>
+          </a:xfrm>
+          <a:prstGeom prst="rect">
+            <a:avLst/>
+          </a:prstGeom>
+          <a:noFill/>
+        </p:spPr>
+        <p:txBody>
+          <a:bodyPr wrap="square">
+            <a:spAutoFit/>
+          </a:bodyPr>
+          <a:lstStyle/>
+          <a:p>
+            <a:pPr algn="ctr">
+              <a:lnSpc>
+                <a:spcPct val="108000"/>
+              </a:lnSpc>
+            </a:pPr>
+            <a:r>
+              <a:rPr lang="en-US" sz="900" kern="0" spc="50" dirty="0">
+                <a:solidFill>
+                  <a:schemeClr val="bg2">
+                    <a:lumMod val="90000"/>
+                  </a:schemeClr>
+                </a:solidFill>
+                <a:latin typeface="Red Hat Mono Medium" pitchFamily="34" charset="0"/>
+                <a:ea typeface="Red Hat Mono Medium" pitchFamily="34" charset="-122"/>
+                <a:cs typeface="Red Hat Mono Medium" pitchFamily="34" charset="-120"/>
+              </a:rPr>
+              <a:t>EDA &amp; SQL PROJECT PRESENTATION by RIZKI FIRDAUS</a:t>
+            </a:r>
+            <a:endParaRPr lang="en-US" sz="900" dirty="0">
+              <a:solidFill>
+                <a:schemeClr val="bg2">
+                  <a:lumMod val="90000"/>
+                </a:schemeClr>
+              </a:solidFill>
+            </a:endParaRPr>
+          </a:p>
+        </p:txBody>
+      </p:sp>
+      <p:sp>
+        <p:nvSpPr>
+          <p:cNvPr id="7" name="TextBox 6">
+            <a:extLst>
+              <a:ext uri="{FF2B5EF4-FFF2-40B4-BE49-F238E27FC236}">
+                <a16:creationId xmlns:a16="http://schemas.microsoft.com/office/drawing/2014/main" id="{29248937-619F-D4A1-E712-899E029C3267}"/>
+              </a:ext>
+            </a:extLst>
+          </p:cNvPr>
+          <p:cNvSpPr txBox="1"/>
+          <p:nvPr/>
+        </p:nvSpPr>
+        <p:spPr>
+          <a:xfrm rot="16200000">
+            <a:off x="-3291204" y="3313584"/>
+            <a:ext cx="6858002" cy="230832"/>
+          </a:xfrm>
+          <a:prstGeom prst="rect">
+            <a:avLst/>
+          </a:prstGeom>
+          <a:noFill/>
+        </p:spPr>
+        <p:txBody>
+          <a:bodyPr wrap="square" rtlCol="0">
+            <a:spAutoFit/>
+          </a:bodyPr>
+          <a:lstStyle/>
+          <a:p>
+            <a:pPr algn="ctr"/>
+            <a:r>
+              <a:rPr lang="en-US" sz="900" kern="0" spc="50" dirty="0">
+                <a:solidFill>
+                  <a:schemeClr val="bg2">
+                    <a:lumMod val="90000"/>
+                  </a:schemeClr>
+                </a:solidFill>
+                <a:latin typeface="Red Hat Mono Medium" pitchFamily="34" charset="0"/>
+                <a:ea typeface="Red Hat Mono Medium" pitchFamily="34" charset="-122"/>
+                <a:cs typeface="Red Hat Mono Medium" pitchFamily="34" charset="-120"/>
+              </a:rPr>
+              <a:t>IRONHACK | WEEK 3 | PROJECT 1</a:t>
+            </a:r>
+            <a:endParaRPr lang="en-US" sz="900" dirty="0"/>
+          </a:p>
+        </p:txBody>
+      </p:sp>
+      <p:sp>
+        <p:nvSpPr>
+          <p:cNvPr id="8" name="TextBox 7">
+            <a:extLst>
+              <a:ext uri="{FF2B5EF4-FFF2-40B4-BE49-F238E27FC236}">
+                <a16:creationId xmlns:a16="http://schemas.microsoft.com/office/drawing/2014/main" id="{7146D1B1-CE6A-7633-2489-B4D39A269D41}"/>
+              </a:ext>
+            </a:extLst>
+          </p:cNvPr>
+          <p:cNvSpPr txBox="1"/>
+          <p:nvPr/>
+        </p:nvSpPr>
+        <p:spPr>
+          <a:xfrm>
+            <a:off x="0" y="20750"/>
+            <a:ext cx="12192000" cy="236155"/>
+          </a:xfrm>
+          <a:prstGeom prst="rect">
+            <a:avLst/>
+          </a:prstGeom>
+          <a:noFill/>
+        </p:spPr>
+        <p:txBody>
+          <a:bodyPr wrap="square">
+            <a:spAutoFit/>
+          </a:bodyPr>
+          <a:lstStyle/>
+          <a:p>
+            <a:pPr algn="ctr">
+              <a:lnSpc>
+                <a:spcPct val="108000"/>
+              </a:lnSpc>
+            </a:pPr>
+            <a:r>
+              <a:rPr lang="en-US" sz="900" kern="0" spc="50" dirty="0">
+                <a:solidFill>
+                  <a:schemeClr val="bg2">
+                    <a:lumMod val="90000"/>
+                  </a:schemeClr>
+                </a:solidFill>
+                <a:latin typeface="Red Hat Mono Medium" pitchFamily="34" charset="0"/>
+                <a:ea typeface="Red Hat Mono Medium" pitchFamily="34" charset="-122"/>
+                <a:cs typeface="Red Hat Mono Medium" pitchFamily="34" charset="-120"/>
+              </a:rPr>
+              <a:t>- COFFEE LAND VS PRICE -</a:t>
+            </a:r>
+            <a:endParaRPr lang="en-US" sz="900" dirty="0">
+              <a:solidFill>
+                <a:schemeClr val="bg2">
+                  <a:lumMod val="90000"/>
+                </a:schemeClr>
+              </a:solidFill>
+            </a:endParaRPr>
+          </a:p>
+        </p:txBody>
+      </p:sp>
+      <p:sp>
+        <p:nvSpPr>
+          <p:cNvPr id="10" name="TextBox 9">
+            <a:extLst>
+              <a:ext uri="{FF2B5EF4-FFF2-40B4-BE49-F238E27FC236}">
+                <a16:creationId xmlns:a16="http://schemas.microsoft.com/office/drawing/2014/main" id="{42E8C9D1-FB29-1E12-50C0-95CC84F3030B}"/>
+              </a:ext>
+            </a:extLst>
+          </p:cNvPr>
+          <p:cNvSpPr txBox="1"/>
+          <p:nvPr/>
+        </p:nvSpPr>
+        <p:spPr>
+          <a:xfrm rot="5400000">
+            <a:off x="8626826" y="3313584"/>
+            <a:ext cx="6858002" cy="230832"/>
+          </a:xfrm>
+          <a:prstGeom prst="rect">
+            <a:avLst/>
+          </a:prstGeom>
+          <a:noFill/>
+        </p:spPr>
+        <p:txBody>
+          <a:bodyPr wrap="square" rtlCol="0">
+            <a:spAutoFit/>
+          </a:bodyPr>
+          <a:lstStyle/>
+          <a:p>
+            <a:pPr algn="ctr"/>
+            <a:r>
+              <a:rPr lang="en-US" sz="900" kern="0" spc="50" dirty="0">
+                <a:solidFill>
+                  <a:schemeClr val="bg2">
+                    <a:lumMod val="90000"/>
+                  </a:schemeClr>
+                </a:solidFill>
+                <a:latin typeface="Red Hat Mono Medium" pitchFamily="34" charset="0"/>
+                <a:ea typeface="Red Hat Mono Medium" pitchFamily="34" charset="-122"/>
+                <a:cs typeface="Red Hat Mono Medium" pitchFamily="34" charset="-120"/>
+              </a:rPr>
+              <a:t>2 OCTOBER 2026</a:t>
+            </a:r>
+            <a:endParaRPr lang="en-US" sz="900" dirty="0"/>
+          </a:p>
+        </p:txBody>
+      </p:sp>
+    </p:spTree>
+    <p:extLst>
+      <p:ext uri="{BB962C8B-B14F-4D97-AF65-F5344CB8AC3E}">
+        <p14:creationId xmlns:p14="http://schemas.microsoft.com/office/powerpoint/2010/main" val="2680737445"/>
+      </p:ext>
+    </p:extLst>
+  </p:cSld>
+  <p:clrMapOvr>
+    <a:masterClrMapping/>
+  </p:clrMapOvr>
+</p:sld>
+</file>
+
+<file path=ppt/slides/slide9.xml><?xml version="1.0" encoding="utf-8"?>
+<p:sld xmlns:a="http://schemas.openxmlformats.org/drawingml/2006/main" xmlns:r="http://schemas.openxmlformats.org/officeDocument/2006/relationships" xmlns:p="http://schemas.openxmlformats.org/presentationml/2006/main">
+  <p:cSld>
+    <p:spTree>
+      <p:nvGrpSpPr>
+        <p:cNvPr id="1" name=""/>
+        <p:cNvGrpSpPr/>
+        <p:nvPr/>
+      </p:nvGrpSpPr>
+      <p:grpSpPr>
+        <a:xfrm>
+          <a:off x="0" y="0"/>
+          <a:ext cx="0" cy="0"/>
+          <a:chOff x="0" y="0"/>
+          <a:chExt cx="0" cy="0"/>
+        </a:xfrm>
+      </p:grpSpPr>
+      <p:sp>
+        <p:nvSpPr>
+          <p:cNvPr id="4" name="Shape 0">
+            <a:extLst>
+              <a:ext uri="{FF2B5EF4-FFF2-40B4-BE49-F238E27FC236}">
+                <a16:creationId xmlns:a16="http://schemas.microsoft.com/office/drawing/2014/main" id="{BB8F9F53-7FAD-866F-EE2C-579F70C941C9}"/>
+              </a:ext>
+            </a:extLst>
+          </p:cNvPr>
+          <p:cNvSpPr/>
+          <p:nvPr/>
+        </p:nvSpPr>
+        <p:spPr>
+          <a:xfrm>
+            <a:off x="0" y="0"/>
+            <a:ext cx="12192000" cy="6858000"/>
+          </a:xfrm>
+          <a:prstGeom prst="rect">
+            <a:avLst/>
+          </a:prstGeom>
+          <a:solidFill>
+            <a:srgbClr val="FAFAF8"/>
+          </a:solidFill>
+          <a:ln/>
+        </p:spPr>
+        <p:txBody>
+          <a:bodyPr/>
+          <a:lstStyle/>
+          <a:p>
+            <a:endParaRPr lang="en-US"/>
+          </a:p>
+        </p:txBody>
+      </p:sp>
+      <p:sp>
+        <p:nvSpPr>
+          <p:cNvPr id="2" name="Text 5">
+            <a:extLst>
+              <a:ext uri="{FF2B5EF4-FFF2-40B4-BE49-F238E27FC236}">
+                <a16:creationId xmlns:a16="http://schemas.microsoft.com/office/drawing/2014/main" id="{8F1E294D-C61B-9416-78F5-75E03A11DE2E}"/>
+              </a:ext>
+            </a:extLst>
+          </p:cNvPr>
+          <p:cNvSpPr/>
+          <p:nvPr/>
+        </p:nvSpPr>
+        <p:spPr>
+          <a:xfrm>
+            <a:off x="0" y="4629803"/>
+            <a:ext cx="12192000" cy="312998"/>
+          </a:xfrm>
+          <a:prstGeom prst="rect">
+            <a:avLst/>
+          </a:prstGeom>
+          <a:noFill/>
+          <a:ln/>
+        </p:spPr>
+        <p:txBody>
+          <a:bodyPr wrap="square" lIns="0" tIns="0" rIns="0" bIns="0" rtlCol="0" anchor="t">
+            <a:noAutofit/>
+          </a:bodyPr>
+          <a:lstStyle/>
+          <a:p>
+            <a:pPr marL="0" indent="0" algn="ctr">
+              <a:lnSpc>
+                <a:spcPct val="108000"/>
+              </a:lnSpc>
+              <a:buNone/>
+            </a:pPr>
+            <a:r>
+              <a:rPr lang="en-US" kern="0" spc="50" dirty="0">
+                <a:solidFill>
+                  <a:schemeClr val="bg1">
+                    <a:lumMod val="65000"/>
+                  </a:schemeClr>
+                </a:solidFill>
+                <a:latin typeface="Red Hat Mono Medium" pitchFamily="34" charset="0"/>
+                <a:ea typeface="Red Hat Mono Medium" pitchFamily="34" charset="-122"/>
+                <a:cs typeface="Red Hat Mono Medium" pitchFamily="34" charset="-120"/>
+              </a:rPr>
+              <a:t>T H A N K  Y O U .</a:t>
+            </a:r>
+            <a:endParaRPr lang="en-US" dirty="0">
+              <a:solidFill>
+                <a:schemeClr val="bg1">
+                  <a:lumMod val="65000"/>
+                </a:schemeClr>
+              </a:solidFill>
+            </a:endParaRPr>
+          </a:p>
+        </p:txBody>
+      </p:sp>
+      <p:pic>
+        <p:nvPicPr>
+          <p:cNvPr id="3" name="Picture 2">
+            <a:extLst>
+              <a:ext uri="{FF2B5EF4-FFF2-40B4-BE49-F238E27FC236}">
+                <a16:creationId xmlns:a16="http://schemas.microsoft.com/office/drawing/2014/main" id="{59486776-E240-5698-272E-D52764F3D652}"/>
+              </a:ext>
+            </a:extLst>
+          </p:cNvPr>
+          <p:cNvPicPr>
+            <a:picLocks noChangeAspect="1"/>
+          </p:cNvPicPr>
+          <p:nvPr/>
+        </p:nvPicPr>
+        <p:blipFill>
+          <a:blip r:embed="rId2"/>
+          <a:stretch>
+            <a:fillRect/>
+          </a:stretch>
+        </p:blipFill>
+        <p:spPr>
+          <a:xfrm>
+            <a:off x="5817544" y="5538502"/>
+            <a:ext cx="556912" cy="602067"/>
+          </a:xfrm>
+          <a:prstGeom prst="rect">
+            <a:avLst/>
+          </a:prstGeom>
+        </p:spPr>
+      </p:pic>
+      <p:sp>
+        <p:nvSpPr>
+          <p:cNvPr id="9" name="TextBox 8">
+            <a:extLst>
+              <a:ext uri="{FF2B5EF4-FFF2-40B4-BE49-F238E27FC236}">
+                <a16:creationId xmlns:a16="http://schemas.microsoft.com/office/drawing/2014/main" id="{486D40BB-26BA-FB0A-E51B-4B2D847A8442}"/>
+              </a:ext>
+            </a:extLst>
+          </p:cNvPr>
+          <p:cNvSpPr txBox="1"/>
+          <p:nvPr/>
+        </p:nvSpPr>
+        <p:spPr>
+          <a:xfrm>
+            <a:off x="0" y="6381207"/>
+            <a:ext cx="12192000" cy="236155"/>
+          </a:xfrm>
+          <a:prstGeom prst="rect">
+            <a:avLst/>
+          </a:prstGeom>
+          <a:noFill/>
+        </p:spPr>
+        <p:txBody>
+          <a:bodyPr wrap="square">
+            <a:spAutoFit/>
+          </a:bodyPr>
+          <a:lstStyle/>
+          <a:p>
+            <a:pPr algn="ctr">
+              <a:lnSpc>
+                <a:spcPct val="108000"/>
+              </a:lnSpc>
+            </a:pPr>
+            <a:r>
+              <a:rPr lang="en-US" sz="900" kern="0" spc="50" dirty="0">
+                <a:solidFill>
+                  <a:schemeClr val="bg2">
+                    <a:lumMod val="90000"/>
+                  </a:schemeClr>
+                </a:solidFill>
+                <a:latin typeface="Red Hat Mono Medium" pitchFamily="34" charset="0"/>
+                <a:ea typeface="Red Hat Mono Medium" pitchFamily="34" charset="-122"/>
+                <a:cs typeface="Red Hat Mono Medium" pitchFamily="34" charset="-120"/>
+              </a:rPr>
+              <a:t>IRONHACK | WEEK 3 | PROJECT 1 | COFFEE LAND VS PRICE </a:t>
+            </a:r>
+            <a:r>
+              <a:rPr lang="en-US" sz="900" dirty="0">
+                <a:solidFill>
+                  <a:schemeClr val="bg2">
+                    <a:lumMod val="90000"/>
+                  </a:schemeClr>
+                </a:solidFill>
+              </a:rPr>
+              <a:t>| </a:t>
+            </a:r>
+            <a:r>
+              <a:rPr lang="en-US" sz="900" kern="0" spc="50" dirty="0">
+                <a:solidFill>
+                  <a:schemeClr val="bg2">
+                    <a:lumMod val="90000"/>
+                  </a:schemeClr>
+                </a:solidFill>
+                <a:latin typeface="Red Hat Mono Medium" pitchFamily="34" charset="0"/>
+                <a:ea typeface="Red Hat Mono Medium" pitchFamily="34" charset="-122"/>
+                <a:cs typeface="Red Hat Mono Medium" pitchFamily="34" charset="-120"/>
+              </a:rPr>
+              <a:t>EDA &amp; SQL PROJECT PRESENTATION by RIZKI FIRDAUS | FRIDAY, 2 OCTOBER 2026</a:t>
+            </a:r>
+            <a:endParaRPr lang="en-US" sz="900" dirty="0"/>
+          </a:p>
+        </p:txBody>
+      </p:sp>
+    </p:spTree>
+    <p:extLst>
+      <p:ext uri="{BB962C8B-B14F-4D97-AF65-F5344CB8AC3E}">
+        <p14:creationId xmlns:p14="http://schemas.microsoft.com/office/powerpoint/2010/main" val="4162081119"/>
+      </p:ext>
+    </p:extLst>
   </p:cSld>
   <p:clrMapOvr>
     <a:masterClrMapping/>

--- a/presentation/project-1-presentation-rizki.pptx
+++ b/presentation/project-1-presentation-rizki.pptx
@@ -5459,7 +5459,7 @@
         </p:nvSpPr>
         <p:spPr>
           <a:xfrm>
-            <a:off x="494551" y="517291"/>
+            <a:off x="624075" y="500575"/>
             <a:ext cx="3400107" cy="530820"/>
           </a:xfrm>
           <a:prstGeom prst="rect">
@@ -6036,15 +6036,15 @@
               </a:clrTo>
             </a:clrChange>
           </a:blip>
-          <a:srcRect l="-1" r="621"/>
+          <a:srcRect l="-1" t="4033" r="621" b="2954"/>
           <a:stretch>
             <a:fillRect/>
           </a:stretch>
         </p:blipFill>
         <p:spPr>
           <a:xfrm>
-            <a:off x="6329726" y="245026"/>
-            <a:ext cx="5709977" cy="3456728"/>
+            <a:off x="6070799" y="299431"/>
+            <a:ext cx="5968906" cy="3361079"/>
           </a:xfrm>
           <a:prstGeom prst="rect">
             <a:avLst/>
@@ -6072,14 +6072,15 @@
               </a:clrTo>
             </a:clrChange>
           </a:blip>
+          <a:srcRect t="5973"/>
           <a:stretch>
             <a:fillRect/>
           </a:stretch>
         </p:blipFill>
         <p:spPr>
           <a:xfrm>
-            <a:off x="6356709" y="3888577"/>
-            <a:ext cx="5676147" cy="2771295"/>
+            <a:off x="6130583" y="3948186"/>
+            <a:ext cx="5849338" cy="2685268"/>
           </a:xfrm>
           <a:prstGeom prst="rect">
             <a:avLst/>

--- a/presentation/project-1-presentation-rizki.pptx
+++ b/presentation/project-1-presentation-rizki.pptx
@@ -3865,7 +3865,7 @@
                 <a:ea typeface="Schibsted Grotesk" pitchFamily="34" charset="-122"/>
                 <a:cs typeface="Schibsted Grotesk" pitchFamily="34" charset="-120"/>
               </a:rPr>
-              <a:t>Two usable data frame inputs remained after filtering.</a:t>
+              <a:t>Two usable data records inputs remained after filtering.</a:t>
             </a:r>
             <a:endParaRPr lang="en-US" sz="1600" dirty="0"/>
           </a:p>
